--- a/Mapped Curriculum Lessons/Grade 8/Lesson 35 - Functions with 2D Data/Functions with 2D Data - Slides.pptx
+++ b/Mapped Curriculum Lessons/Grade 8/Lesson 35 - Functions with 2D Data/Functions with 2D Data - Slides.pptx
@@ -2,28 +2,28 @@
 <file path=ppt/presentation.xml><?xml version="1.0" encoding="utf-8"?>
 <p:presentation xmlns:p="http://schemas.openxmlformats.org/presentationml/2006/main" embedTrueTypeFonts="1" saveSubsetFonts="0">
   <p:sldMasterIdLst>
-    <p:sldMasterId xmlns:r="http://schemas.openxmlformats.org/officeDocument/2006/relationships" id="2147483648" r:id="R1c3f1d4e300642f2"/>
+    <p:sldMasterId xmlns:r="http://schemas.openxmlformats.org/officeDocument/2006/relationships" id="2147483648" r:id="Reaead6367ed74a76"/>
   </p:sldMasterIdLst>
   <p:notesMasterIdLst>
-    <p:notesMasterId xmlns:r="http://schemas.openxmlformats.org/officeDocument/2006/relationships" r:id="Rfe7396c2f2cf4e9f"/>
+    <p:notesMasterId xmlns:r="http://schemas.openxmlformats.org/officeDocument/2006/relationships" r:id="R931729b3d1a04c16"/>
   </p:notesMasterIdLst>
   <p:sldIdLst>
-    <p:sldId xmlns:r="http://schemas.openxmlformats.org/officeDocument/2006/relationships" id="256" r:id="Rc7d3beca24c94ea1"/>
-    <p:sldId xmlns:r="http://schemas.openxmlformats.org/officeDocument/2006/relationships" id="257" r:id="R32df682bd3304c24"/>
-    <p:sldId xmlns:r="http://schemas.openxmlformats.org/officeDocument/2006/relationships" id="258" r:id="R5efb76290c3e4477"/>
-    <p:sldId xmlns:r="http://schemas.openxmlformats.org/officeDocument/2006/relationships" id="259" r:id="Rf6ac979de99a4b36"/>
-    <p:sldId xmlns:r="http://schemas.openxmlformats.org/officeDocument/2006/relationships" id="260" r:id="R8aa33af24fd240c0"/>
-    <p:sldId xmlns:r="http://schemas.openxmlformats.org/officeDocument/2006/relationships" id="261" r:id="Re1cfada2f72e456b"/>
-    <p:sldId xmlns:r="http://schemas.openxmlformats.org/officeDocument/2006/relationships" id="262" r:id="R9083dfad698d4dd2"/>
-    <p:sldId xmlns:r="http://schemas.openxmlformats.org/officeDocument/2006/relationships" id="263" r:id="R55480172d0dc49b8"/>
-    <p:sldId xmlns:r="http://schemas.openxmlformats.org/officeDocument/2006/relationships" id="264" r:id="Rc2e72194e8334e43"/>
+    <p:sldId xmlns:r="http://schemas.openxmlformats.org/officeDocument/2006/relationships" id="256" r:id="R881aa84507e746c2"/>
+    <p:sldId xmlns:r="http://schemas.openxmlformats.org/officeDocument/2006/relationships" id="257" r:id="R22d60379055d40b8"/>
+    <p:sldId xmlns:r="http://schemas.openxmlformats.org/officeDocument/2006/relationships" id="258" r:id="Re47eb54bb75e4473"/>
+    <p:sldId xmlns:r="http://schemas.openxmlformats.org/officeDocument/2006/relationships" id="259" r:id="R1d86614999284edb"/>
+    <p:sldId xmlns:r="http://schemas.openxmlformats.org/officeDocument/2006/relationships" id="260" r:id="Rdff3300d4af941b2"/>
+    <p:sldId xmlns:r="http://schemas.openxmlformats.org/officeDocument/2006/relationships" id="261" r:id="Rbeab9fbdddf14acd"/>
+    <p:sldId xmlns:r="http://schemas.openxmlformats.org/officeDocument/2006/relationships" id="262" r:id="R1d7cd60e4fee468e"/>
+    <p:sldId xmlns:r="http://schemas.openxmlformats.org/officeDocument/2006/relationships" id="263" r:id="Rba485252b05441d5"/>
+    <p:sldId xmlns:r="http://schemas.openxmlformats.org/officeDocument/2006/relationships" id="264" r:id="R5d388f7e6ddd44a8"/>
   </p:sldIdLst>
   <p:sldSz cx="12192000" cy="6858000"/>
   <p:notesSz cx="6858000" cy="9144000"/>
   <p:embeddedFontLst>
     <p:embeddedFont>
       <p:font typeface="JetBrains Mono"/>
-      <p:regular xmlns:r="http://schemas.openxmlformats.org/officeDocument/2006/relationships" r:id="R6d35507512994ac7"/>
+      <p:regular xmlns:r="http://schemas.openxmlformats.org/officeDocument/2006/relationships" r:id="Rc9dce1dde99a40d3"/>
     </p:embeddedFont>
   </p:embeddedFontLst>
 </p:presentation>
@@ -1071,7 +1071,7 @@
           <p:nvPr/>
         </p:nvPicPr>
         <p:blipFill rotWithShape="1">
-          <a:blip xmlns:r="http://schemas.openxmlformats.org/officeDocument/2006/relationships" xmlns:a="http://schemas.openxmlformats.org/drawingml/2006/main" r:embed="Rca50227ac7214f4e"/>
+          <a:blip xmlns:r="http://schemas.openxmlformats.org/officeDocument/2006/relationships" xmlns:a="http://schemas.openxmlformats.org/drawingml/2006/main" r:embed="R57da7ada96ab4efc"/>
           <a:stretch xmlns:a="http://schemas.openxmlformats.org/drawingml/2006/main"/>
         </p:blipFill>
         <p:spPr>
@@ -1451,7 +1451,7 @@
           <p:nvPr/>
         </p:nvPicPr>
         <p:blipFill rotWithShape="1">
-          <a:blip xmlns:r="http://schemas.openxmlformats.org/officeDocument/2006/relationships" xmlns:a="http://schemas.openxmlformats.org/drawingml/2006/main" r:embed="R158bc86b913646b1">
+          <a:blip xmlns:r="http://schemas.openxmlformats.org/officeDocument/2006/relationships" xmlns:a="http://schemas.openxmlformats.org/drawingml/2006/main" r:embed="Re8b00e8755a14da9">
             <a:alphaModFix amt="28000"/>
           </a:blip>
           <a:stretch xmlns:a="http://schemas.openxmlformats.org/drawingml/2006/main"/>
@@ -1664,7 +1664,7 @@
           <p:nvPr/>
         </p:nvPicPr>
         <p:blipFill rotWithShape="1">
-          <a:blip xmlns:r="http://schemas.openxmlformats.org/officeDocument/2006/relationships" xmlns:a="http://schemas.openxmlformats.org/drawingml/2006/main" r:embed="Rb5983ce2535b4556">
+          <a:blip xmlns:r="http://schemas.openxmlformats.org/officeDocument/2006/relationships" xmlns:a="http://schemas.openxmlformats.org/drawingml/2006/main" r:embed="Ra568de716aeb41c9">
             <a:alphaModFix amt="28000"/>
           </a:blip>
           <a:stretch xmlns:a="http://schemas.openxmlformats.org/drawingml/2006/main"/>
@@ -1899,7 +1899,7 @@
           <p:nvPr/>
         </p:nvPicPr>
         <p:blipFill rotWithShape="1">
-          <a:blip xmlns:r="http://schemas.openxmlformats.org/officeDocument/2006/relationships" xmlns:a="http://schemas.openxmlformats.org/drawingml/2006/main" r:embed="Rbb98a00c1ca2497f">
+          <a:blip xmlns:r="http://schemas.openxmlformats.org/officeDocument/2006/relationships" xmlns:a="http://schemas.openxmlformats.org/drawingml/2006/main" r:embed="Rb8e6861d9f534880">
             <a:alphaModFix amt="28000"/>
           </a:blip>
           <a:stretch xmlns:a="http://schemas.openxmlformats.org/drawingml/2006/main"/>
@@ -2176,7 +2176,7 @@
           <p:nvPr/>
         </p:nvPicPr>
         <p:blipFill rotWithShape="1">
-          <a:blip xmlns:r="http://schemas.openxmlformats.org/officeDocument/2006/relationships" xmlns:a="http://schemas.openxmlformats.org/drawingml/2006/main" r:embed="R233b459c00884cf6">
+          <a:blip xmlns:r="http://schemas.openxmlformats.org/officeDocument/2006/relationships" xmlns:a="http://schemas.openxmlformats.org/drawingml/2006/main" r:embed="R2833479df1ef400c">
             <a:alphaModFix amt="28000"/>
           </a:blip>
           <a:stretch xmlns:a="http://schemas.openxmlformats.org/drawingml/2006/main"/>
@@ -2451,7 +2451,7 @@
           <p:nvPr/>
         </p:nvPicPr>
         <p:blipFill rotWithShape="1">
-          <a:blip xmlns:r="http://schemas.openxmlformats.org/officeDocument/2006/relationships" xmlns:a="http://schemas.openxmlformats.org/drawingml/2006/main" r:embed="Rad813b63d67b4c1f">
+          <a:blip xmlns:r="http://schemas.openxmlformats.org/officeDocument/2006/relationships" xmlns:a="http://schemas.openxmlformats.org/drawingml/2006/main" r:embed="R4e4247a8ce364f19">
             <a:alphaModFix amt="28000"/>
           </a:blip>
           <a:stretch xmlns:a="http://schemas.openxmlformats.org/drawingml/2006/main"/>
@@ -2875,7 +2875,7 @@
           <p:nvPr/>
         </p:nvPicPr>
         <p:blipFill rotWithShape="1">
-          <a:blip xmlns:r="http://schemas.openxmlformats.org/officeDocument/2006/relationships" xmlns:a="http://schemas.openxmlformats.org/drawingml/2006/main" r:embed="R58c7a958e6464e24">
+          <a:blip xmlns:r="http://schemas.openxmlformats.org/officeDocument/2006/relationships" xmlns:a="http://schemas.openxmlformats.org/drawingml/2006/main" r:embed="Rf07e3b4529054729">
             <a:alphaModFix amt="28000"/>
           </a:blip>
           <a:stretch xmlns:a="http://schemas.openxmlformats.org/drawingml/2006/main"/>
@@ -3016,7 +3016,7 @@
           <p:nvPr/>
         </p:nvPicPr>
         <p:blipFill rotWithShape="1">
-          <a:blip xmlns:r="http://schemas.openxmlformats.org/officeDocument/2006/relationships" xmlns:a="http://schemas.openxmlformats.org/drawingml/2006/main" r:embed="R769637c14e1a4ed0">
+          <a:blip xmlns:r="http://schemas.openxmlformats.org/officeDocument/2006/relationships" xmlns:a="http://schemas.openxmlformats.org/drawingml/2006/main" r:embed="R3adfe184de5f4f0f">
             <a:alphaModFix amt="28000"/>
           </a:blip>
           <a:stretch xmlns:a="http://schemas.openxmlformats.org/drawingml/2006/main"/>
@@ -3130,7 +3130,7 @@
           <p:nvPr/>
         </p:nvPicPr>
         <p:blipFill rotWithShape="1">
-          <a:blip xmlns:r="http://schemas.openxmlformats.org/officeDocument/2006/relationships" xmlns:a="http://schemas.openxmlformats.org/drawingml/2006/main" r:embed="R220ffe4cbe5a40be">
+          <a:blip xmlns:r="http://schemas.openxmlformats.org/officeDocument/2006/relationships" xmlns:a="http://schemas.openxmlformats.org/drawingml/2006/main" r:embed="R9f4edf0e0c364b23">
             <a:alphaModFix amt="28000"/>
           </a:blip>
           <a:stretch xmlns:a="http://schemas.openxmlformats.org/drawingml/2006/main"/>
@@ -3457,7 +3457,7 @@
           <p:nvPr/>
         </p:nvPicPr>
         <p:blipFill rotWithShape="1">
-          <a:blip xmlns:r="http://schemas.openxmlformats.org/officeDocument/2006/relationships" xmlns:a="http://schemas.openxmlformats.org/drawingml/2006/main" r:embed="Rf11c1d3fed894967">
+          <a:blip xmlns:r="http://schemas.openxmlformats.org/officeDocument/2006/relationships" xmlns:a="http://schemas.openxmlformats.org/drawingml/2006/main" r:embed="Rdd49b98050b24772">
             <a:alphaModFix amt="28000"/>
           </a:blip>
           <a:stretch xmlns:a="http://schemas.openxmlformats.org/drawingml/2006/main"/>
@@ -3745,7 +3745,7 @@
           <p:nvPr/>
         </p:nvPicPr>
         <p:blipFill rotWithShape="1">
-          <a:blip xmlns:r="http://schemas.openxmlformats.org/officeDocument/2006/relationships" xmlns:a="http://schemas.openxmlformats.org/drawingml/2006/main" r:embed="R7292ee2fa0514467">
+          <a:blip xmlns:r="http://schemas.openxmlformats.org/officeDocument/2006/relationships" xmlns:a="http://schemas.openxmlformats.org/drawingml/2006/main" r:embed="R92cff23d5fa946e7">
             <a:alphaModFix amt="28000"/>
           </a:blip>
           <a:stretch xmlns:a="http://schemas.openxmlformats.org/drawingml/2006/main"/>
@@ -3982,17 +3982,17 @@
   </p:cSld>
   <p:clrMap bg1="lt1" tx1="dk1" bg2="lt2" tx2="dk2" accent1="accent1" accent2="accent2" accent3="accent3" accent4="accent4" accent5="accent5" accent6="accent6" hlink="hlink" folHlink="folHlink"/>
   <p:sldLayoutIdLst>
-    <p:sldLayoutId xmlns:r="http://schemas.openxmlformats.org/officeDocument/2006/relationships" id="2147483649" r:id="Rf9064b6c72ae4daf"/>
-    <p:sldLayoutId xmlns:r="http://schemas.openxmlformats.org/officeDocument/2006/relationships" id="2147483650" r:id="Ree101c1cbf914edb"/>
-    <p:sldLayoutId xmlns:r="http://schemas.openxmlformats.org/officeDocument/2006/relationships" id="2147483651" r:id="Rebdcdb4614f54077"/>
-    <p:sldLayoutId xmlns:r="http://schemas.openxmlformats.org/officeDocument/2006/relationships" id="2147483652" r:id="Rc078a512a30e4a33"/>
-    <p:sldLayoutId xmlns:r="http://schemas.openxmlformats.org/officeDocument/2006/relationships" id="2147483653" r:id="R5b555918d8f64b65"/>
-    <p:sldLayoutId xmlns:r="http://schemas.openxmlformats.org/officeDocument/2006/relationships" id="2147483654" r:id="Rf88d3b60b66a4bdb"/>
-    <p:sldLayoutId xmlns:r="http://schemas.openxmlformats.org/officeDocument/2006/relationships" id="2147483655" r:id="R99b8f9c7979f4933"/>
-    <p:sldLayoutId xmlns:r="http://schemas.openxmlformats.org/officeDocument/2006/relationships" id="2147483656" r:id="R70d737f4e4a04832"/>
-    <p:sldLayoutId xmlns:r="http://schemas.openxmlformats.org/officeDocument/2006/relationships" id="2147483657" r:id="R7a853a2b5d62411e"/>
-    <p:sldLayoutId xmlns:r="http://schemas.openxmlformats.org/officeDocument/2006/relationships" id="2147483658" r:id="R1e7452e21fda43fb"/>
-    <p:sldLayoutId xmlns:r="http://schemas.openxmlformats.org/officeDocument/2006/relationships" id="2147483659" r:id="R09735af11c9c4496"/>
+    <p:sldLayoutId xmlns:r="http://schemas.openxmlformats.org/officeDocument/2006/relationships" id="2147483649" r:id="R57c3329590744ecf"/>
+    <p:sldLayoutId xmlns:r="http://schemas.openxmlformats.org/officeDocument/2006/relationships" id="2147483650" r:id="Rbd5856e10a5f4e49"/>
+    <p:sldLayoutId xmlns:r="http://schemas.openxmlformats.org/officeDocument/2006/relationships" id="2147483651" r:id="R948e1dd5113f40b3"/>
+    <p:sldLayoutId xmlns:r="http://schemas.openxmlformats.org/officeDocument/2006/relationships" id="2147483652" r:id="Rd8c3e89f75a44c0a"/>
+    <p:sldLayoutId xmlns:r="http://schemas.openxmlformats.org/officeDocument/2006/relationships" id="2147483653" r:id="Rb3f344aa9d60445c"/>
+    <p:sldLayoutId xmlns:r="http://schemas.openxmlformats.org/officeDocument/2006/relationships" id="2147483654" r:id="R17f225f429214d19"/>
+    <p:sldLayoutId xmlns:r="http://schemas.openxmlformats.org/officeDocument/2006/relationships" id="2147483655" r:id="Rb302a83a7b464773"/>
+    <p:sldLayoutId xmlns:r="http://schemas.openxmlformats.org/officeDocument/2006/relationships" id="2147483656" r:id="R11f25cc0b77842a8"/>
+    <p:sldLayoutId xmlns:r="http://schemas.openxmlformats.org/officeDocument/2006/relationships" id="2147483657" r:id="Rfb05da8af94f411f"/>
+    <p:sldLayoutId xmlns:r="http://schemas.openxmlformats.org/officeDocument/2006/relationships" id="2147483658" r:id="Rb4a2b4eafe3c4568"/>
+    <p:sldLayoutId xmlns:r="http://schemas.openxmlformats.org/officeDocument/2006/relationships" id="2147483659" r:id="Rf8119594a0fa4b0e"/>
   </p:sldLayoutIdLst>
   <p:hf hdr="0" ftr="0" dt="0"/>
   <p:txStyles>

--- a/Mapped Curriculum Lessons/Grade 8/Lesson 35 - Functions with 2D Data/Functions with 2D Data - Slides.pptx
+++ b/Mapped Curriculum Lessons/Grade 8/Lesson 35 - Functions with 2D Data/Functions with 2D Data - Slides.pptx
@@ -2,28 +2,28 @@
 <file path=ppt/presentation.xml><?xml version="1.0" encoding="utf-8"?>
 <p:presentation xmlns:p="http://schemas.openxmlformats.org/presentationml/2006/main" embedTrueTypeFonts="1" saveSubsetFonts="0">
   <p:sldMasterIdLst>
-    <p:sldMasterId xmlns:r="http://schemas.openxmlformats.org/officeDocument/2006/relationships" id="2147483648" r:id="Reaead6367ed74a76"/>
+    <p:sldMasterId xmlns:r="http://schemas.openxmlformats.org/officeDocument/2006/relationships" id="2147483648" r:id="R47f4ea7b218c42f1"/>
   </p:sldMasterIdLst>
   <p:notesMasterIdLst>
-    <p:notesMasterId xmlns:r="http://schemas.openxmlformats.org/officeDocument/2006/relationships" r:id="R931729b3d1a04c16"/>
+    <p:notesMasterId xmlns:r="http://schemas.openxmlformats.org/officeDocument/2006/relationships" r:id="R3983081c95d344fb"/>
   </p:notesMasterIdLst>
   <p:sldIdLst>
-    <p:sldId xmlns:r="http://schemas.openxmlformats.org/officeDocument/2006/relationships" id="256" r:id="R881aa84507e746c2"/>
-    <p:sldId xmlns:r="http://schemas.openxmlformats.org/officeDocument/2006/relationships" id="257" r:id="R22d60379055d40b8"/>
-    <p:sldId xmlns:r="http://schemas.openxmlformats.org/officeDocument/2006/relationships" id="258" r:id="Re47eb54bb75e4473"/>
-    <p:sldId xmlns:r="http://schemas.openxmlformats.org/officeDocument/2006/relationships" id="259" r:id="R1d86614999284edb"/>
-    <p:sldId xmlns:r="http://schemas.openxmlformats.org/officeDocument/2006/relationships" id="260" r:id="Rdff3300d4af941b2"/>
-    <p:sldId xmlns:r="http://schemas.openxmlformats.org/officeDocument/2006/relationships" id="261" r:id="Rbeab9fbdddf14acd"/>
-    <p:sldId xmlns:r="http://schemas.openxmlformats.org/officeDocument/2006/relationships" id="262" r:id="R1d7cd60e4fee468e"/>
-    <p:sldId xmlns:r="http://schemas.openxmlformats.org/officeDocument/2006/relationships" id="263" r:id="Rba485252b05441d5"/>
-    <p:sldId xmlns:r="http://schemas.openxmlformats.org/officeDocument/2006/relationships" id="264" r:id="R5d388f7e6ddd44a8"/>
+    <p:sldId xmlns:r="http://schemas.openxmlformats.org/officeDocument/2006/relationships" id="256" r:id="Rb84d671466394d7e"/>
+    <p:sldId xmlns:r="http://schemas.openxmlformats.org/officeDocument/2006/relationships" id="257" r:id="Rc4840e2e009f4a8a"/>
+    <p:sldId xmlns:r="http://schemas.openxmlformats.org/officeDocument/2006/relationships" id="258" r:id="Rea1736c1811945bc"/>
+    <p:sldId xmlns:r="http://schemas.openxmlformats.org/officeDocument/2006/relationships" id="259" r:id="R404e922e00c044f7"/>
+    <p:sldId xmlns:r="http://schemas.openxmlformats.org/officeDocument/2006/relationships" id="260" r:id="R7a8fb973a3584ae4"/>
+    <p:sldId xmlns:r="http://schemas.openxmlformats.org/officeDocument/2006/relationships" id="261" r:id="R2daf41c9433146d7"/>
+    <p:sldId xmlns:r="http://schemas.openxmlformats.org/officeDocument/2006/relationships" id="262" r:id="Rd2b701c7ce4d4e54"/>
+    <p:sldId xmlns:r="http://schemas.openxmlformats.org/officeDocument/2006/relationships" id="263" r:id="R4d5baa16ba6243c4"/>
+    <p:sldId xmlns:r="http://schemas.openxmlformats.org/officeDocument/2006/relationships" id="264" r:id="Rb82e58d3fefb4a50"/>
   </p:sldIdLst>
   <p:sldSz cx="12192000" cy="6858000"/>
   <p:notesSz cx="6858000" cy="9144000"/>
   <p:embeddedFontLst>
     <p:embeddedFont>
       <p:font typeface="JetBrains Mono"/>
-      <p:regular xmlns:r="http://schemas.openxmlformats.org/officeDocument/2006/relationships" r:id="Rc9dce1dde99a40d3"/>
+      <p:regular xmlns:r="http://schemas.openxmlformats.org/officeDocument/2006/relationships" r:id="Rcdd63cf485b94e3a"/>
     </p:embeddedFont>
   </p:embeddedFontLst>
 </p:presentation>
@@ -1071,7 +1071,7 @@
           <p:nvPr/>
         </p:nvPicPr>
         <p:blipFill rotWithShape="1">
-          <a:blip xmlns:r="http://schemas.openxmlformats.org/officeDocument/2006/relationships" xmlns:a="http://schemas.openxmlformats.org/drawingml/2006/main" r:embed="R57da7ada96ab4efc"/>
+          <a:blip xmlns:r="http://schemas.openxmlformats.org/officeDocument/2006/relationships" xmlns:a="http://schemas.openxmlformats.org/drawingml/2006/main" r:embed="Rc40cdd6a3b1549b6"/>
           <a:stretch xmlns:a="http://schemas.openxmlformats.org/drawingml/2006/main"/>
         </p:blipFill>
         <p:spPr>
@@ -1451,7 +1451,7 @@
           <p:nvPr/>
         </p:nvPicPr>
         <p:blipFill rotWithShape="1">
-          <a:blip xmlns:r="http://schemas.openxmlformats.org/officeDocument/2006/relationships" xmlns:a="http://schemas.openxmlformats.org/drawingml/2006/main" r:embed="Re8b00e8755a14da9">
+          <a:blip xmlns:r="http://schemas.openxmlformats.org/officeDocument/2006/relationships" xmlns:a="http://schemas.openxmlformats.org/drawingml/2006/main" r:embed="R50c6065fb190407a">
             <a:alphaModFix amt="28000"/>
           </a:blip>
           <a:stretch xmlns:a="http://schemas.openxmlformats.org/drawingml/2006/main"/>
@@ -1664,7 +1664,7 @@
           <p:nvPr/>
         </p:nvPicPr>
         <p:blipFill rotWithShape="1">
-          <a:blip xmlns:r="http://schemas.openxmlformats.org/officeDocument/2006/relationships" xmlns:a="http://schemas.openxmlformats.org/drawingml/2006/main" r:embed="Ra568de716aeb41c9">
+          <a:blip xmlns:r="http://schemas.openxmlformats.org/officeDocument/2006/relationships" xmlns:a="http://schemas.openxmlformats.org/drawingml/2006/main" r:embed="R4ca1caec94bb4fee">
             <a:alphaModFix amt="28000"/>
           </a:blip>
           <a:stretch xmlns:a="http://schemas.openxmlformats.org/drawingml/2006/main"/>
@@ -1899,7 +1899,7 @@
           <p:nvPr/>
         </p:nvPicPr>
         <p:blipFill rotWithShape="1">
-          <a:blip xmlns:r="http://schemas.openxmlformats.org/officeDocument/2006/relationships" xmlns:a="http://schemas.openxmlformats.org/drawingml/2006/main" r:embed="Rb8e6861d9f534880">
+          <a:blip xmlns:r="http://schemas.openxmlformats.org/officeDocument/2006/relationships" xmlns:a="http://schemas.openxmlformats.org/drawingml/2006/main" r:embed="Rc920aa04b9be4247">
             <a:alphaModFix amt="28000"/>
           </a:blip>
           <a:stretch xmlns:a="http://schemas.openxmlformats.org/drawingml/2006/main"/>
@@ -2176,7 +2176,7 @@
           <p:nvPr/>
         </p:nvPicPr>
         <p:blipFill rotWithShape="1">
-          <a:blip xmlns:r="http://schemas.openxmlformats.org/officeDocument/2006/relationships" xmlns:a="http://schemas.openxmlformats.org/drawingml/2006/main" r:embed="R2833479df1ef400c">
+          <a:blip xmlns:r="http://schemas.openxmlformats.org/officeDocument/2006/relationships" xmlns:a="http://schemas.openxmlformats.org/drawingml/2006/main" r:embed="Rb9b4494d0c4d4ad4">
             <a:alphaModFix amt="28000"/>
           </a:blip>
           <a:stretch xmlns:a="http://schemas.openxmlformats.org/drawingml/2006/main"/>
@@ -2451,7 +2451,7 @@
           <p:nvPr/>
         </p:nvPicPr>
         <p:blipFill rotWithShape="1">
-          <a:blip xmlns:r="http://schemas.openxmlformats.org/officeDocument/2006/relationships" xmlns:a="http://schemas.openxmlformats.org/drawingml/2006/main" r:embed="R4e4247a8ce364f19">
+          <a:blip xmlns:r="http://schemas.openxmlformats.org/officeDocument/2006/relationships" xmlns:a="http://schemas.openxmlformats.org/drawingml/2006/main" r:embed="Rb8b7cae99c244295">
             <a:alphaModFix amt="28000"/>
           </a:blip>
           <a:stretch xmlns:a="http://schemas.openxmlformats.org/drawingml/2006/main"/>
@@ -2875,7 +2875,7 @@
           <p:nvPr/>
         </p:nvPicPr>
         <p:blipFill rotWithShape="1">
-          <a:blip xmlns:r="http://schemas.openxmlformats.org/officeDocument/2006/relationships" xmlns:a="http://schemas.openxmlformats.org/drawingml/2006/main" r:embed="Rf07e3b4529054729">
+          <a:blip xmlns:r="http://schemas.openxmlformats.org/officeDocument/2006/relationships" xmlns:a="http://schemas.openxmlformats.org/drawingml/2006/main" r:embed="R222ad5fefdab49d1">
             <a:alphaModFix amt="28000"/>
           </a:blip>
           <a:stretch xmlns:a="http://schemas.openxmlformats.org/drawingml/2006/main"/>
@@ -3016,7 +3016,7 @@
           <p:nvPr/>
         </p:nvPicPr>
         <p:blipFill rotWithShape="1">
-          <a:blip xmlns:r="http://schemas.openxmlformats.org/officeDocument/2006/relationships" xmlns:a="http://schemas.openxmlformats.org/drawingml/2006/main" r:embed="R3adfe184de5f4f0f">
+          <a:blip xmlns:r="http://schemas.openxmlformats.org/officeDocument/2006/relationships" xmlns:a="http://schemas.openxmlformats.org/drawingml/2006/main" r:embed="R453c3277ee9a4305">
             <a:alphaModFix amt="28000"/>
           </a:blip>
           <a:stretch xmlns:a="http://schemas.openxmlformats.org/drawingml/2006/main"/>
@@ -3130,7 +3130,7 @@
           <p:nvPr/>
         </p:nvPicPr>
         <p:blipFill rotWithShape="1">
-          <a:blip xmlns:r="http://schemas.openxmlformats.org/officeDocument/2006/relationships" xmlns:a="http://schemas.openxmlformats.org/drawingml/2006/main" r:embed="R9f4edf0e0c364b23">
+          <a:blip xmlns:r="http://schemas.openxmlformats.org/officeDocument/2006/relationships" xmlns:a="http://schemas.openxmlformats.org/drawingml/2006/main" r:embed="Rc5d4739f086342db">
             <a:alphaModFix amt="28000"/>
           </a:blip>
           <a:stretch xmlns:a="http://schemas.openxmlformats.org/drawingml/2006/main"/>
@@ -3457,7 +3457,7 @@
           <p:nvPr/>
         </p:nvPicPr>
         <p:blipFill rotWithShape="1">
-          <a:blip xmlns:r="http://schemas.openxmlformats.org/officeDocument/2006/relationships" xmlns:a="http://schemas.openxmlformats.org/drawingml/2006/main" r:embed="Rdd49b98050b24772">
+          <a:blip xmlns:r="http://schemas.openxmlformats.org/officeDocument/2006/relationships" xmlns:a="http://schemas.openxmlformats.org/drawingml/2006/main" r:embed="R887e4591b31a4667">
             <a:alphaModFix amt="28000"/>
           </a:blip>
           <a:stretch xmlns:a="http://schemas.openxmlformats.org/drawingml/2006/main"/>
@@ -3745,7 +3745,7 @@
           <p:nvPr/>
         </p:nvPicPr>
         <p:blipFill rotWithShape="1">
-          <a:blip xmlns:r="http://schemas.openxmlformats.org/officeDocument/2006/relationships" xmlns:a="http://schemas.openxmlformats.org/drawingml/2006/main" r:embed="R92cff23d5fa946e7">
+          <a:blip xmlns:r="http://schemas.openxmlformats.org/officeDocument/2006/relationships" xmlns:a="http://schemas.openxmlformats.org/drawingml/2006/main" r:embed="R5b41dc080e8141d9">
             <a:alphaModFix amt="28000"/>
           </a:blip>
           <a:stretch xmlns:a="http://schemas.openxmlformats.org/drawingml/2006/main"/>
@@ -3982,17 +3982,17 @@
   </p:cSld>
   <p:clrMap bg1="lt1" tx1="dk1" bg2="lt2" tx2="dk2" accent1="accent1" accent2="accent2" accent3="accent3" accent4="accent4" accent5="accent5" accent6="accent6" hlink="hlink" folHlink="folHlink"/>
   <p:sldLayoutIdLst>
-    <p:sldLayoutId xmlns:r="http://schemas.openxmlformats.org/officeDocument/2006/relationships" id="2147483649" r:id="R57c3329590744ecf"/>
-    <p:sldLayoutId xmlns:r="http://schemas.openxmlformats.org/officeDocument/2006/relationships" id="2147483650" r:id="Rbd5856e10a5f4e49"/>
-    <p:sldLayoutId xmlns:r="http://schemas.openxmlformats.org/officeDocument/2006/relationships" id="2147483651" r:id="R948e1dd5113f40b3"/>
-    <p:sldLayoutId xmlns:r="http://schemas.openxmlformats.org/officeDocument/2006/relationships" id="2147483652" r:id="Rd8c3e89f75a44c0a"/>
-    <p:sldLayoutId xmlns:r="http://schemas.openxmlformats.org/officeDocument/2006/relationships" id="2147483653" r:id="Rb3f344aa9d60445c"/>
-    <p:sldLayoutId xmlns:r="http://schemas.openxmlformats.org/officeDocument/2006/relationships" id="2147483654" r:id="R17f225f429214d19"/>
-    <p:sldLayoutId xmlns:r="http://schemas.openxmlformats.org/officeDocument/2006/relationships" id="2147483655" r:id="Rb302a83a7b464773"/>
-    <p:sldLayoutId xmlns:r="http://schemas.openxmlformats.org/officeDocument/2006/relationships" id="2147483656" r:id="R11f25cc0b77842a8"/>
-    <p:sldLayoutId xmlns:r="http://schemas.openxmlformats.org/officeDocument/2006/relationships" id="2147483657" r:id="Rfb05da8af94f411f"/>
-    <p:sldLayoutId xmlns:r="http://schemas.openxmlformats.org/officeDocument/2006/relationships" id="2147483658" r:id="Rb4a2b4eafe3c4568"/>
-    <p:sldLayoutId xmlns:r="http://schemas.openxmlformats.org/officeDocument/2006/relationships" id="2147483659" r:id="Rf8119594a0fa4b0e"/>
+    <p:sldLayoutId xmlns:r="http://schemas.openxmlformats.org/officeDocument/2006/relationships" id="2147483649" r:id="R2b1e2aeee7984db0"/>
+    <p:sldLayoutId xmlns:r="http://schemas.openxmlformats.org/officeDocument/2006/relationships" id="2147483650" r:id="R83eee98e8f3e4ce8"/>
+    <p:sldLayoutId xmlns:r="http://schemas.openxmlformats.org/officeDocument/2006/relationships" id="2147483651" r:id="Rebdddde64f584216"/>
+    <p:sldLayoutId xmlns:r="http://schemas.openxmlformats.org/officeDocument/2006/relationships" id="2147483652" r:id="Rc6fe5f6f77af48c3"/>
+    <p:sldLayoutId xmlns:r="http://schemas.openxmlformats.org/officeDocument/2006/relationships" id="2147483653" r:id="R5017351b625a41ed"/>
+    <p:sldLayoutId xmlns:r="http://schemas.openxmlformats.org/officeDocument/2006/relationships" id="2147483654" r:id="Rbd22f11bbdcd4c61"/>
+    <p:sldLayoutId xmlns:r="http://schemas.openxmlformats.org/officeDocument/2006/relationships" id="2147483655" r:id="Rab0de2ddfa544b3a"/>
+    <p:sldLayoutId xmlns:r="http://schemas.openxmlformats.org/officeDocument/2006/relationships" id="2147483656" r:id="R5a191db4cdc34cd4"/>
+    <p:sldLayoutId xmlns:r="http://schemas.openxmlformats.org/officeDocument/2006/relationships" id="2147483657" r:id="R020663d055794abb"/>
+    <p:sldLayoutId xmlns:r="http://schemas.openxmlformats.org/officeDocument/2006/relationships" id="2147483658" r:id="R03e1b0799e7244a4"/>
+    <p:sldLayoutId xmlns:r="http://schemas.openxmlformats.org/officeDocument/2006/relationships" id="2147483659" r:id="Rcfdf33c3994945ce"/>
   </p:sldLayoutIdLst>
   <p:hf hdr="0" ftr="0" dt="0"/>
   <p:txStyles>
@@ -10278,7 +10278,7 @@
         </p:spPr>
         <p:txBody>
           <a:bodyPr xmlns:a="http://schemas.openxmlformats.org/drawingml/2006/main">
-            <a:normAutofit fontScale="100000"/>
+            <a:normAutofit fontScale="82877"/>
           </a:bodyPr>
           <a:lstStyle xmlns:a="http://schemas.openxmlformats.org/drawingml/2006/main"/>
           <a:p xmlns:a="http://schemas.openxmlformats.org/drawingml/2006/main">
@@ -10297,18 +10297,18 @@
                 <a:ea typeface="Calibri"/>
                 <a:cs typeface="Calibri"/>
               </a:rPr>
-              <a:t>Build a small results manager using [name, score] rows and three functions: display every record, search by lower-case name, and </a:t>
+              <a:t>Store [</a:t>
             </a:r>
             <a:r>
               <a:rPr sz="2400" b="0">
                 <a:solidFill>
-                  <a:srgbClr val="1750EB"/>
-                </a:solidFill>
-                <a:latin typeface="JetBrains Mono"/>
-                <a:ea typeface="JetBrains Mono"/>
-                <a:cs typeface="JetBrains Mono"/>
-              </a:rPr>
-              <a:t>return</a:t>
+                  <a:srgbClr val="067D17"/>
+                </a:solidFill>
+                <a:latin typeface="JetBrains Mono"/>
+                <a:ea typeface="JetBrains Mono"/>
+                <a:cs typeface="JetBrains Mono"/>
+              </a:rPr>
+              <a:t>"ari"</a:t>
             </a:r>
             <a:r>
               <a:rPr sz="2400" b="0">
@@ -10319,7 +10319,293 @@
                 <a:ea typeface="Calibri"/>
                 <a:cs typeface="Calibri"/>
               </a:rPr>
-              <a:t> the highest score. The main program must call all three and show a clear not-found message for a missing name.</a:t>
+              <a:t>, 7], [</a:t>
+            </a:r>
+            <a:r>
+              <a:rPr sz="2400" b="0">
+                <a:solidFill>
+                  <a:srgbClr val="067D17"/>
+                </a:solidFill>
+                <a:latin typeface="JetBrains Mono"/>
+                <a:ea typeface="JetBrains Mono"/>
+                <a:cs typeface="JetBrains Mono"/>
+              </a:rPr>
+              <a:t>"bao"</a:t>
+            </a:r>
+            <a:r>
+              <a:rPr sz="2400" b="0">
+                <a:solidFill>
+                  <a:srgbClr val="080808"/>
+                </a:solidFill>
+                <a:latin typeface="Calibri"/>
+                <a:ea typeface="Calibri"/>
+                <a:cs typeface="Calibri"/>
+              </a:rPr>
+              <a:t>, 9] and [</a:t>
+            </a:r>
+            <a:r>
+              <a:rPr sz="2400" b="0">
+                <a:solidFill>
+                  <a:srgbClr val="067D17"/>
+                </a:solidFill>
+                <a:latin typeface="JetBrains Mono"/>
+                <a:ea typeface="JetBrains Mono"/>
+                <a:cs typeface="JetBrains Mono"/>
+              </a:rPr>
+              <a:t>"cleo"</a:t>
+            </a:r>
+            <a:r>
+              <a:rPr sz="2400" b="0">
+                <a:solidFill>
+                  <a:srgbClr val="080808"/>
+                </a:solidFill>
+                <a:latin typeface="Calibri"/>
+                <a:ea typeface="Calibri"/>
+                <a:cs typeface="Calibri"/>
+              </a:rPr>
+              <a:t>, 8] in [results]. Write </a:t>
+            </a:r>
+            <a:r>
+              <a:rPr sz="2400" b="0">
+                <a:solidFill>
+                  <a:srgbClr val="1750EB"/>
+                </a:solidFill>
+                <a:latin typeface="JetBrains Mono"/>
+                <a:ea typeface="JetBrains Mono"/>
+                <a:cs typeface="JetBrains Mono"/>
+              </a:rPr>
+              <a:t>show_records</a:t>
+            </a:r>
+            <a:r>
+              <a:rPr sz="2400" b="0">
+                <a:solidFill>
+                  <a:srgbClr val="080808"/>
+                </a:solidFill>
+                <a:latin typeface="Calibri"/>
+                <a:ea typeface="Calibri"/>
+                <a:cs typeface="Calibri"/>
+              </a:rPr>
+              <a:t>(records) to display every name and score. Write </a:t>
+            </a:r>
+            <a:r>
+              <a:rPr sz="2400" b="0">
+                <a:solidFill>
+                  <a:srgbClr val="1750EB"/>
+                </a:solidFill>
+                <a:latin typeface="JetBrains Mono"/>
+                <a:ea typeface="JetBrains Mono"/>
+                <a:cs typeface="JetBrains Mono"/>
+              </a:rPr>
+              <a:t>find_score</a:t>
+            </a:r>
+            <a:r>
+              <a:rPr sz="2400" b="0">
+                <a:solidFill>
+                  <a:srgbClr val="080808"/>
+                </a:solidFill>
+                <a:latin typeface="Calibri"/>
+                <a:ea typeface="Calibri"/>
+                <a:cs typeface="Calibri"/>
+              </a:rPr>
+              <a:t>(records, target) to </a:t>
+            </a:r>
+            <a:r>
+              <a:rPr sz="2400" b="0">
+                <a:solidFill>
+                  <a:srgbClr val="1750EB"/>
+                </a:solidFill>
+                <a:latin typeface="JetBrains Mono"/>
+                <a:ea typeface="JetBrains Mono"/>
+                <a:cs typeface="JetBrains Mono"/>
+              </a:rPr>
+              <a:t>return</a:t>
+            </a:r>
+            <a:r>
+              <a:rPr sz="2400" b="0">
+                <a:solidFill>
+                  <a:srgbClr val="080808"/>
+                </a:solidFill>
+                <a:latin typeface="Calibri"/>
+                <a:ea typeface="Calibri"/>
+                <a:cs typeface="Calibri"/>
+              </a:rPr>
+              <a:t> the matching score or -1. Write </a:t>
+            </a:r>
+            <a:r>
+              <a:rPr sz="2400" b="0">
+                <a:solidFill>
+                  <a:srgbClr val="1750EB"/>
+                </a:solidFill>
+                <a:latin typeface="JetBrains Mono"/>
+                <a:ea typeface="JetBrains Mono"/>
+                <a:cs typeface="JetBrains Mono"/>
+              </a:rPr>
+              <a:t>highest_score</a:t>
+            </a:r>
+            <a:r>
+              <a:rPr sz="2400" b="0">
+                <a:solidFill>
+                  <a:srgbClr val="080808"/>
+                </a:solidFill>
+                <a:latin typeface="Calibri"/>
+                <a:ea typeface="Calibri"/>
+                <a:cs typeface="Calibri"/>
+              </a:rPr>
+              <a:t>(records) to </a:t>
+            </a:r>
+            <a:r>
+              <a:rPr sz="2400" b="0">
+                <a:solidFill>
+                  <a:srgbClr val="1750EB"/>
+                </a:solidFill>
+                <a:latin typeface="JetBrains Mono"/>
+                <a:ea typeface="JetBrains Mono"/>
+                <a:cs typeface="JetBrains Mono"/>
+              </a:rPr>
+              <a:t>return</a:t>
+            </a:r>
+            <a:r>
+              <a:rPr sz="2400" b="0">
+                <a:solidFill>
+                  <a:srgbClr val="080808"/>
+                </a:solidFill>
+                <a:latin typeface="Calibri"/>
+                <a:ea typeface="Calibri"/>
+                <a:cs typeface="Calibri"/>
+              </a:rPr>
+              <a:t> the highest score. In the main program, call all three functions. Test </a:t>
+            </a:r>
+            <a:r>
+              <a:rPr sz="2400" b="0">
+                <a:solidFill>
+                  <a:srgbClr val="067D17"/>
+                </a:solidFill>
+                <a:latin typeface="JetBrains Mono"/>
+                <a:ea typeface="JetBrains Mono"/>
+                <a:cs typeface="JetBrains Mono"/>
+              </a:rPr>
+              <a:t>"Bao"</a:t>
+            </a:r>
+            <a:r>
+              <a:rPr sz="2400" b="0">
+                <a:solidFill>
+                  <a:srgbClr val="080808"/>
+                </a:solidFill>
+                <a:latin typeface="Calibri"/>
+                <a:ea typeface="Calibri"/>
+                <a:cs typeface="Calibri"/>
+              </a:rPr>
+              <a:t>; display </a:t>
+            </a:r>
+            <a:r>
+              <a:rPr sz="2400" b="0">
+                <a:solidFill>
+                  <a:srgbClr val="067D17"/>
+                </a:solidFill>
+                <a:latin typeface="JetBrains Mono"/>
+                <a:ea typeface="JetBrains Mono"/>
+                <a:cs typeface="JetBrains Mono"/>
+              </a:rPr>
+              <a:t>"Score: 9"</a:t>
+            </a:r>
+            <a:r>
+              <a:rPr sz="2400" b="0">
+                <a:solidFill>
+                  <a:srgbClr val="080808"/>
+                </a:solidFill>
+                <a:latin typeface="Calibri"/>
+                <a:ea typeface="Calibri"/>
+                <a:cs typeface="Calibri"/>
+              </a:rPr>
+              <a:t> and </a:t>
+            </a:r>
+            <a:r>
+              <a:rPr sz="2400" b="0">
+                <a:solidFill>
+                  <a:srgbClr val="067D17"/>
+                </a:solidFill>
+                <a:latin typeface="JetBrains Mono"/>
+                <a:ea typeface="JetBrains Mono"/>
+                <a:cs typeface="JetBrains Mono"/>
+              </a:rPr>
+              <a:t>"Highest score: 9"</a:t>
+            </a:r>
+            <a:r>
+              <a:rPr sz="2400" b="0">
+                <a:solidFill>
+                  <a:srgbClr val="080808"/>
+                </a:solidFill>
+                <a:latin typeface="Calibri"/>
+                <a:ea typeface="Calibri"/>
+                <a:cs typeface="Calibri"/>
+              </a:rPr>
+              <a:t>. Test </a:t>
+            </a:r>
+            <a:r>
+              <a:rPr sz="2400" b="0">
+                <a:solidFill>
+                  <a:srgbClr val="067D17"/>
+                </a:solidFill>
+                <a:latin typeface="JetBrains Mono"/>
+                <a:ea typeface="JetBrains Mono"/>
+                <a:cs typeface="JetBrains Mono"/>
+              </a:rPr>
+              <a:t>"Mina"</a:t>
+            </a:r>
+            <a:r>
+              <a:rPr sz="2400" b="0">
+                <a:solidFill>
+                  <a:srgbClr val="080808"/>
+                </a:solidFill>
+                <a:latin typeface="Calibri"/>
+                <a:ea typeface="Calibri"/>
+                <a:cs typeface="Calibri"/>
+              </a:rPr>
+              <a:t>; display </a:t>
+            </a:r>
+            <a:r>
+              <a:rPr sz="2400" b="0">
+                <a:solidFill>
+                  <a:srgbClr val="067D17"/>
+                </a:solidFill>
+                <a:latin typeface="JetBrains Mono"/>
+                <a:ea typeface="JetBrains Mono"/>
+                <a:cs typeface="JetBrains Mono"/>
+              </a:rPr>
+              <a:t>"Name not found."</a:t>
+            </a:r>
+            <a:r>
+              <a:rPr sz="2400" b="0">
+                <a:solidFill>
+                  <a:srgbClr val="080808"/>
+                </a:solidFill>
+                <a:latin typeface="Calibri"/>
+                <a:ea typeface="Calibri"/>
+                <a:cs typeface="Calibri"/>
+              </a:rPr>
+              <a:t> and </a:t>
+            </a:r>
+            <a:r>
+              <a:rPr sz="2400" b="0">
+                <a:solidFill>
+                  <a:srgbClr val="067D17"/>
+                </a:solidFill>
+                <a:latin typeface="JetBrains Mono"/>
+                <a:ea typeface="JetBrains Mono"/>
+                <a:cs typeface="JetBrains Mono"/>
+              </a:rPr>
+              <a:t>"Highest score: 9"</a:t>
+            </a:r>
+            <a:r>
+              <a:rPr sz="2400" b="0">
+                <a:solidFill>
+                  <a:srgbClr val="080808"/>
+                </a:solidFill>
+                <a:latin typeface="Calibri"/>
+                <a:ea typeface="Calibri"/>
+                <a:cs typeface="Calibri"/>
+              </a:rPr>
+              <a:t>.</a:t>
             </a:r>
           </a:p>
         </p:txBody>

--- a/Mapped Curriculum Lessons/Grade 8/Lesson 35 - Functions with 2D Data/Functions with 2D Data - Slides.pptx
+++ b/Mapped Curriculum Lessons/Grade 8/Lesson 35 - Functions with 2D Data/Functions with 2D Data - Slides.pptx
@@ -2,28 +2,28 @@
 <file path=ppt/presentation.xml><?xml version="1.0" encoding="utf-8"?>
 <p:presentation xmlns:p="http://schemas.openxmlformats.org/presentationml/2006/main" embedTrueTypeFonts="1" saveSubsetFonts="0">
   <p:sldMasterIdLst>
-    <p:sldMasterId xmlns:r="http://schemas.openxmlformats.org/officeDocument/2006/relationships" id="2147483648" r:id="R47f4ea7b218c42f1"/>
+    <p:sldMasterId xmlns:r="http://schemas.openxmlformats.org/officeDocument/2006/relationships" id="2147483648" r:id="R27f80a0e8ed64dcb"/>
   </p:sldMasterIdLst>
   <p:notesMasterIdLst>
-    <p:notesMasterId xmlns:r="http://schemas.openxmlformats.org/officeDocument/2006/relationships" r:id="R3983081c95d344fb"/>
+    <p:notesMasterId xmlns:r="http://schemas.openxmlformats.org/officeDocument/2006/relationships" r:id="Rccd99e5593824a9a"/>
   </p:notesMasterIdLst>
   <p:sldIdLst>
-    <p:sldId xmlns:r="http://schemas.openxmlformats.org/officeDocument/2006/relationships" id="256" r:id="Rb84d671466394d7e"/>
-    <p:sldId xmlns:r="http://schemas.openxmlformats.org/officeDocument/2006/relationships" id="257" r:id="Rc4840e2e009f4a8a"/>
-    <p:sldId xmlns:r="http://schemas.openxmlformats.org/officeDocument/2006/relationships" id="258" r:id="Rea1736c1811945bc"/>
-    <p:sldId xmlns:r="http://schemas.openxmlformats.org/officeDocument/2006/relationships" id="259" r:id="R404e922e00c044f7"/>
-    <p:sldId xmlns:r="http://schemas.openxmlformats.org/officeDocument/2006/relationships" id="260" r:id="R7a8fb973a3584ae4"/>
-    <p:sldId xmlns:r="http://schemas.openxmlformats.org/officeDocument/2006/relationships" id="261" r:id="R2daf41c9433146d7"/>
-    <p:sldId xmlns:r="http://schemas.openxmlformats.org/officeDocument/2006/relationships" id="262" r:id="Rd2b701c7ce4d4e54"/>
-    <p:sldId xmlns:r="http://schemas.openxmlformats.org/officeDocument/2006/relationships" id="263" r:id="R4d5baa16ba6243c4"/>
-    <p:sldId xmlns:r="http://schemas.openxmlformats.org/officeDocument/2006/relationships" id="264" r:id="Rb82e58d3fefb4a50"/>
+    <p:sldId xmlns:r="http://schemas.openxmlformats.org/officeDocument/2006/relationships" id="256" r:id="Rfb3799cca7464c08"/>
+    <p:sldId xmlns:r="http://schemas.openxmlformats.org/officeDocument/2006/relationships" id="257" r:id="Recd283b7740a40d5"/>
+    <p:sldId xmlns:r="http://schemas.openxmlformats.org/officeDocument/2006/relationships" id="258" r:id="R3f34c840779c4507"/>
+    <p:sldId xmlns:r="http://schemas.openxmlformats.org/officeDocument/2006/relationships" id="259" r:id="R69485a76aad64280"/>
+    <p:sldId xmlns:r="http://schemas.openxmlformats.org/officeDocument/2006/relationships" id="260" r:id="R90490bb897574422"/>
+    <p:sldId xmlns:r="http://schemas.openxmlformats.org/officeDocument/2006/relationships" id="261" r:id="R60fe02aeb5324890"/>
+    <p:sldId xmlns:r="http://schemas.openxmlformats.org/officeDocument/2006/relationships" id="262" r:id="R4d8f225e552841ba"/>
+    <p:sldId xmlns:r="http://schemas.openxmlformats.org/officeDocument/2006/relationships" id="263" r:id="R2ba7d1281ecf442d"/>
+    <p:sldId xmlns:r="http://schemas.openxmlformats.org/officeDocument/2006/relationships" id="264" r:id="R0e0a8b95ebb14245"/>
   </p:sldIdLst>
   <p:sldSz cx="12192000" cy="6858000"/>
   <p:notesSz cx="6858000" cy="9144000"/>
   <p:embeddedFontLst>
     <p:embeddedFont>
       <p:font typeface="JetBrains Mono"/>
-      <p:regular xmlns:r="http://schemas.openxmlformats.org/officeDocument/2006/relationships" r:id="Rcdd63cf485b94e3a"/>
+      <p:regular xmlns:r="http://schemas.openxmlformats.org/officeDocument/2006/relationships" r:id="R9857a008e39547dc"/>
     </p:embeddedFont>
   </p:embeddedFontLst>
 </p:presentation>
@@ -1071,7 +1071,7 @@
           <p:nvPr/>
         </p:nvPicPr>
         <p:blipFill rotWithShape="1">
-          <a:blip xmlns:r="http://schemas.openxmlformats.org/officeDocument/2006/relationships" xmlns:a="http://schemas.openxmlformats.org/drawingml/2006/main" r:embed="Rc40cdd6a3b1549b6"/>
+          <a:blip xmlns:r="http://schemas.openxmlformats.org/officeDocument/2006/relationships" xmlns:a="http://schemas.openxmlformats.org/drawingml/2006/main" r:embed="R1ce019d0fa534015"/>
           <a:stretch xmlns:a="http://schemas.openxmlformats.org/drawingml/2006/main"/>
         </p:blipFill>
         <p:spPr>
@@ -1451,7 +1451,7 @@
           <p:nvPr/>
         </p:nvPicPr>
         <p:blipFill rotWithShape="1">
-          <a:blip xmlns:r="http://schemas.openxmlformats.org/officeDocument/2006/relationships" xmlns:a="http://schemas.openxmlformats.org/drawingml/2006/main" r:embed="R50c6065fb190407a">
+          <a:blip xmlns:r="http://schemas.openxmlformats.org/officeDocument/2006/relationships" xmlns:a="http://schemas.openxmlformats.org/drawingml/2006/main" r:embed="Rf60df1c11dd64514">
             <a:alphaModFix amt="28000"/>
           </a:blip>
           <a:stretch xmlns:a="http://schemas.openxmlformats.org/drawingml/2006/main"/>
@@ -1664,7 +1664,7 @@
           <p:nvPr/>
         </p:nvPicPr>
         <p:blipFill rotWithShape="1">
-          <a:blip xmlns:r="http://schemas.openxmlformats.org/officeDocument/2006/relationships" xmlns:a="http://schemas.openxmlformats.org/drawingml/2006/main" r:embed="R4ca1caec94bb4fee">
+          <a:blip xmlns:r="http://schemas.openxmlformats.org/officeDocument/2006/relationships" xmlns:a="http://schemas.openxmlformats.org/drawingml/2006/main" r:embed="R2208f0382d734efb">
             <a:alphaModFix amt="28000"/>
           </a:blip>
           <a:stretch xmlns:a="http://schemas.openxmlformats.org/drawingml/2006/main"/>
@@ -1899,7 +1899,7 @@
           <p:nvPr/>
         </p:nvPicPr>
         <p:blipFill rotWithShape="1">
-          <a:blip xmlns:r="http://schemas.openxmlformats.org/officeDocument/2006/relationships" xmlns:a="http://schemas.openxmlformats.org/drawingml/2006/main" r:embed="Rc920aa04b9be4247">
+          <a:blip xmlns:r="http://schemas.openxmlformats.org/officeDocument/2006/relationships" xmlns:a="http://schemas.openxmlformats.org/drawingml/2006/main" r:embed="R4f89a1cea6764e22">
             <a:alphaModFix amt="28000"/>
           </a:blip>
           <a:stretch xmlns:a="http://schemas.openxmlformats.org/drawingml/2006/main"/>
@@ -2176,7 +2176,7 @@
           <p:nvPr/>
         </p:nvPicPr>
         <p:blipFill rotWithShape="1">
-          <a:blip xmlns:r="http://schemas.openxmlformats.org/officeDocument/2006/relationships" xmlns:a="http://schemas.openxmlformats.org/drawingml/2006/main" r:embed="Rb9b4494d0c4d4ad4">
+          <a:blip xmlns:r="http://schemas.openxmlformats.org/officeDocument/2006/relationships" xmlns:a="http://schemas.openxmlformats.org/drawingml/2006/main" r:embed="R0fe8362ceb0c4063">
             <a:alphaModFix amt="28000"/>
           </a:blip>
           <a:stretch xmlns:a="http://schemas.openxmlformats.org/drawingml/2006/main"/>
@@ -2451,7 +2451,7 @@
           <p:nvPr/>
         </p:nvPicPr>
         <p:blipFill rotWithShape="1">
-          <a:blip xmlns:r="http://schemas.openxmlformats.org/officeDocument/2006/relationships" xmlns:a="http://schemas.openxmlformats.org/drawingml/2006/main" r:embed="Rb8b7cae99c244295">
+          <a:blip xmlns:r="http://schemas.openxmlformats.org/officeDocument/2006/relationships" xmlns:a="http://schemas.openxmlformats.org/drawingml/2006/main" r:embed="R13a2b571e1514a77">
             <a:alphaModFix amt="28000"/>
           </a:blip>
           <a:stretch xmlns:a="http://schemas.openxmlformats.org/drawingml/2006/main"/>
@@ -2875,7 +2875,7 @@
           <p:nvPr/>
         </p:nvPicPr>
         <p:blipFill rotWithShape="1">
-          <a:blip xmlns:r="http://schemas.openxmlformats.org/officeDocument/2006/relationships" xmlns:a="http://schemas.openxmlformats.org/drawingml/2006/main" r:embed="R222ad5fefdab49d1">
+          <a:blip xmlns:r="http://schemas.openxmlformats.org/officeDocument/2006/relationships" xmlns:a="http://schemas.openxmlformats.org/drawingml/2006/main" r:embed="Rcef895a935c64f3c">
             <a:alphaModFix amt="28000"/>
           </a:blip>
           <a:stretch xmlns:a="http://schemas.openxmlformats.org/drawingml/2006/main"/>
@@ -3016,7 +3016,7 @@
           <p:nvPr/>
         </p:nvPicPr>
         <p:blipFill rotWithShape="1">
-          <a:blip xmlns:r="http://schemas.openxmlformats.org/officeDocument/2006/relationships" xmlns:a="http://schemas.openxmlformats.org/drawingml/2006/main" r:embed="R453c3277ee9a4305">
+          <a:blip xmlns:r="http://schemas.openxmlformats.org/officeDocument/2006/relationships" xmlns:a="http://schemas.openxmlformats.org/drawingml/2006/main" r:embed="R373d3bb7c55c42a0">
             <a:alphaModFix amt="28000"/>
           </a:blip>
           <a:stretch xmlns:a="http://schemas.openxmlformats.org/drawingml/2006/main"/>
@@ -3130,7 +3130,7 @@
           <p:nvPr/>
         </p:nvPicPr>
         <p:blipFill rotWithShape="1">
-          <a:blip xmlns:r="http://schemas.openxmlformats.org/officeDocument/2006/relationships" xmlns:a="http://schemas.openxmlformats.org/drawingml/2006/main" r:embed="Rc5d4739f086342db">
+          <a:blip xmlns:r="http://schemas.openxmlformats.org/officeDocument/2006/relationships" xmlns:a="http://schemas.openxmlformats.org/drawingml/2006/main" r:embed="R2eec606ceded4e87">
             <a:alphaModFix amt="28000"/>
           </a:blip>
           <a:stretch xmlns:a="http://schemas.openxmlformats.org/drawingml/2006/main"/>
@@ -3457,7 +3457,7 @@
           <p:nvPr/>
         </p:nvPicPr>
         <p:blipFill rotWithShape="1">
-          <a:blip xmlns:r="http://schemas.openxmlformats.org/officeDocument/2006/relationships" xmlns:a="http://schemas.openxmlformats.org/drawingml/2006/main" r:embed="R887e4591b31a4667">
+          <a:blip xmlns:r="http://schemas.openxmlformats.org/officeDocument/2006/relationships" xmlns:a="http://schemas.openxmlformats.org/drawingml/2006/main" r:embed="R0bae87affe524b4a">
             <a:alphaModFix amt="28000"/>
           </a:blip>
           <a:stretch xmlns:a="http://schemas.openxmlformats.org/drawingml/2006/main"/>
@@ -3745,7 +3745,7 @@
           <p:nvPr/>
         </p:nvPicPr>
         <p:blipFill rotWithShape="1">
-          <a:blip xmlns:r="http://schemas.openxmlformats.org/officeDocument/2006/relationships" xmlns:a="http://schemas.openxmlformats.org/drawingml/2006/main" r:embed="R5b41dc080e8141d9">
+          <a:blip xmlns:r="http://schemas.openxmlformats.org/officeDocument/2006/relationships" xmlns:a="http://schemas.openxmlformats.org/drawingml/2006/main" r:embed="R0ac8a1cbc6ed4231">
             <a:alphaModFix amt="28000"/>
           </a:blip>
           <a:stretch xmlns:a="http://schemas.openxmlformats.org/drawingml/2006/main"/>
@@ -3982,17 +3982,17 @@
   </p:cSld>
   <p:clrMap bg1="lt1" tx1="dk1" bg2="lt2" tx2="dk2" accent1="accent1" accent2="accent2" accent3="accent3" accent4="accent4" accent5="accent5" accent6="accent6" hlink="hlink" folHlink="folHlink"/>
   <p:sldLayoutIdLst>
-    <p:sldLayoutId xmlns:r="http://schemas.openxmlformats.org/officeDocument/2006/relationships" id="2147483649" r:id="R2b1e2aeee7984db0"/>
-    <p:sldLayoutId xmlns:r="http://schemas.openxmlformats.org/officeDocument/2006/relationships" id="2147483650" r:id="R83eee98e8f3e4ce8"/>
-    <p:sldLayoutId xmlns:r="http://schemas.openxmlformats.org/officeDocument/2006/relationships" id="2147483651" r:id="Rebdddde64f584216"/>
-    <p:sldLayoutId xmlns:r="http://schemas.openxmlformats.org/officeDocument/2006/relationships" id="2147483652" r:id="Rc6fe5f6f77af48c3"/>
-    <p:sldLayoutId xmlns:r="http://schemas.openxmlformats.org/officeDocument/2006/relationships" id="2147483653" r:id="R5017351b625a41ed"/>
-    <p:sldLayoutId xmlns:r="http://schemas.openxmlformats.org/officeDocument/2006/relationships" id="2147483654" r:id="Rbd22f11bbdcd4c61"/>
-    <p:sldLayoutId xmlns:r="http://schemas.openxmlformats.org/officeDocument/2006/relationships" id="2147483655" r:id="Rab0de2ddfa544b3a"/>
-    <p:sldLayoutId xmlns:r="http://schemas.openxmlformats.org/officeDocument/2006/relationships" id="2147483656" r:id="R5a191db4cdc34cd4"/>
-    <p:sldLayoutId xmlns:r="http://schemas.openxmlformats.org/officeDocument/2006/relationships" id="2147483657" r:id="R020663d055794abb"/>
-    <p:sldLayoutId xmlns:r="http://schemas.openxmlformats.org/officeDocument/2006/relationships" id="2147483658" r:id="R03e1b0799e7244a4"/>
-    <p:sldLayoutId xmlns:r="http://schemas.openxmlformats.org/officeDocument/2006/relationships" id="2147483659" r:id="Rcfdf33c3994945ce"/>
+    <p:sldLayoutId xmlns:r="http://schemas.openxmlformats.org/officeDocument/2006/relationships" id="2147483649" r:id="R39916d4c65704d67"/>
+    <p:sldLayoutId xmlns:r="http://schemas.openxmlformats.org/officeDocument/2006/relationships" id="2147483650" r:id="Ra1324879443844d2"/>
+    <p:sldLayoutId xmlns:r="http://schemas.openxmlformats.org/officeDocument/2006/relationships" id="2147483651" r:id="R9f95af7e5b8f4449"/>
+    <p:sldLayoutId xmlns:r="http://schemas.openxmlformats.org/officeDocument/2006/relationships" id="2147483652" r:id="R80155c7b4c6340f6"/>
+    <p:sldLayoutId xmlns:r="http://schemas.openxmlformats.org/officeDocument/2006/relationships" id="2147483653" r:id="R8afd9b2a910e482e"/>
+    <p:sldLayoutId xmlns:r="http://schemas.openxmlformats.org/officeDocument/2006/relationships" id="2147483654" r:id="R6b9720d207034077"/>
+    <p:sldLayoutId xmlns:r="http://schemas.openxmlformats.org/officeDocument/2006/relationships" id="2147483655" r:id="R8b3a1e3ee79c42fe"/>
+    <p:sldLayoutId xmlns:r="http://schemas.openxmlformats.org/officeDocument/2006/relationships" id="2147483656" r:id="R21d0d590a5b84332"/>
+    <p:sldLayoutId xmlns:r="http://schemas.openxmlformats.org/officeDocument/2006/relationships" id="2147483657" r:id="R11678d4d3bad4898"/>
+    <p:sldLayoutId xmlns:r="http://schemas.openxmlformats.org/officeDocument/2006/relationships" id="2147483658" r:id="R5d558c4fa5bf473c"/>
+    <p:sldLayoutId xmlns:r="http://schemas.openxmlformats.org/officeDocument/2006/relationships" id="2147483659" r:id="R3d5dd4a05b4843f6"/>
   </p:sldLayoutIdLst>
   <p:hf hdr="0" ftr="0" dt="0"/>
   <p:txStyles>
@@ -8291,10 +8291,10 @@
                 <a:ea typeface="Calibri"/>
                 <a:cs typeface="Calibri"/>
               </a:rPr>
-              <a:t>Use </a:t>
-            </a:r>
-            <a:r>
-              <a:rPr sz="2400" b="0">
+              <a:t>Change the example so it makes two fixed searches instead of asking for a club. Call </a:t>
+            </a:r>
+            <a:r>
+              <a:rPr sz="2050" b="0">
                 <a:solidFill>
                   <a:srgbClr val="1750EB"/>
                 </a:solidFill>
@@ -8313,18 +8313,21 @@
                 <a:ea typeface="Calibri"/>
                 <a:cs typeface="Calibri"/>
               </a:rPr>
-              <a:t> to find the number of members in </a:t>
-            </a:r>
-            <a:r>
-              <a:rPr sz="2400" b="0">
-                <a:solidFill>
-                  <a:srgbClr val="067D17"/>
-                </a:solidFill>
-                <a:latin typeface="JetBrains Mono"/>
-                <a:ea typeface="JetBrains Mono"/>
-                <a:cs typeface="JetBrains Mono"/>
-              </a:rPr>
-              <a:t>"art"</a:t>
+              <a:t> with </a:t>
+            </a:r>
+            <a:r>
+              <a:rPr sz="2050" b="0">
+                <a:solidFill>
+                  <a:srgbClr val="6A1B9A"/>
+                </a:solidFill>
+                <a:highlight>
+                  <a:srgbClr val="ECEAF4"/>
+                </a:highlight>
+                <a:latin typeface="JetBrains Mono"/>
+                <a:ea typeface="JetBrains Mono"/>
+                <a:cs typeface="JetBrains Mono"/>
+              </a:rPr>
+              <a:t> clubs </a:t>
             </a:r>
             <a:r>
               <a:rPr sz="2400" b="0">
@@ -8338,7 +8341,7 @@
               <a:t> and </a:t>
             </a:r>
             <a:r>
-              <a:rPr sz="2400" b="0">
+              <a:rPr sz="2050" b="0">
                 <a:solidFill>
                   <a:srgbClr val="067D17"/>
                 </a:solidFill>
@@ -8346,7 +8349,7 @@
                 <a:ea typeface="JetBrains Mono"/>
                 <a:cs typeface="JetBrains Mono"/>
               </a:rPr>
-              <a:t>"code"</a:t>
+              <a:t>"art"</a:t>
             </a:r>
             <a:r>
               <a:rPr sz="2400" b="0">
@@ -8357,18 +8360,21 @@
                 <a:ea typeface="Calibri"/>
                 <a:cs typeface="Calibri"/>
               </a:rPr>
-              <a:t>. Display </a:t>
-            </a:r>
-            <a:r>
-              <a:rPr sz="2400" b="0">
-                <a:solidFill>
-                  <a:srgbClr val="067D17"/>
-                </a:solidFill>
-                <a:latin typeface="JetBrains Mono"/>
-                <a:ea typeface="JetBrains Mono"/>
-                <a:cs typeface="JetBrains Mono"/>
-              </a:rPr>
-              <a:t>"Art: 12"</a:t>
+              <a:t>, then with </a:t>
+            </a:r>
+            <a:r>
+              <a:rPr sz="2050" b="0">
+                <a:solidFill>
+                  <a:srgbClr val="6A1B9A"/>
+                </a:solidFill>
+                <a:highlight>
+                  <a:srgbClr val="ECEAF4"/>
+                </a:highlight>
+                <a:latin typeface="JetBrains Mono"/>
+                <a:ea typeface="JetBrains Mono"/>
+                <a:cs typeface="JetBrains Mono"/>
+              </a:rPr>
+              <a:t> clubs </a:t>
             </a:r>
             <a:r>
               <a:rPr sz="2400" b="0">
@@ -8382,7 +8388,7 @@
               <a:t> and </a:t>
             </a:r>
             <a:r>
-              <a:rPr sz="2400" b="0">
+              <a:rPr sz="2050" b="0">
                 <a:solidFill>
                   <a:srgbClr val="067D17"/>
                 </a:solidFill>
@@ -8390,7 +8396,7 @@
                 <a:ea typeface="JetBrains Mono"/>
                 <a:cs typeface="JetBrains Mono"/>
               </a:rPr>
-              <a:t>"Code: 15"</a:t>
+              <a:t>"code"</a:t>
             </a:r>
             <a:r>
               <a:rPr sz="2400" b="0">
@@ -8401,7 +8407,51 @@
                 <a:ea typeface="Calibri"/>
                 <a:cs typeface="Calibri"/>
               </a:rPr>
-              <a:t> after the three club names.</a:t>
+              <a:t>. Display the results as </a:t>
+            </a:r>
+            <a:r>
+              <a:rPr sz="2050" b="0">
+                <a:solidFill>
+                  <a:srgbClr val="067D17"/>
+                </a:solidFill>
+                <a:latin typeface="JetBrains Mono"/>
+                <a:ea typeface="JetBrains Mono"/>
+                <a:cs typeface="JetBrains Mono"/>
+              </a:rPr>
+              <a:t>"Art: 12"</a:t>
+            </a:r>
+            <a:r>
+              <a:rPr sz="2400" b="0">
+                <a:solidFill>
+                  <a:srgbClr val="080808"/>
+                </a:solidFill>
+                <a:latin typeface="Calibri"/>
+                <a:ea typeface="Calibri"/>
+                <a:cs typeface="Calibri"/>
+              </a:rPr>
+              <a:t> and </a:t>
+            </a:r>
+            <a:r>
+              <a:rPr sz="2050" b="0">
+                <a:solidFill>
+                  <a:srgbClr val="067D17"/>
+                </a:solidFill>
+                <a:latin typeface="JetBrains Mono"/>
+                <a:ea typeface="JetBrains Mono"/>
+                <a:cs typeface="JetBrains Mono"/>
+              </a:rPr>
+              <a:t>"Code: 15"</a:t>
+            </a:r>
+            <a:r>
+              <a:rPr sz="2400" b="0">
+                <a:solidFill>
+                  <a:srgbClr val="080808"/>
+                </a:solidFill>
+                <a:latin typeface="Calibri"/>
+                <a:ea typeface="Calibri"/>
+                <a:cs typeface="Calibri"/>
+              </a:rPr>
+              <a:t> after the club names.</a:t>
             </a:r>
           </a:p>
         </p:txBody>
@@ -9338,10 +9388,10 @@
                 <a:ea typeface="Calibri"/>
                 <a:cs typeface="Calibri"/>
               </a:rPr>
-              <a:t>Add a function </a:t>
-            </a:r>
-            <a:r>
-              <a:rPr sz="2400" b="0">
+              <a:t>Change the example so it adds up the members instead of searching. Write </a:t>
+            </a:r>
+            <a:r>
+              <a:rPr sz="2050" b="0">
                 <a:solidFill>
                   <a:srgbClr val="1750EB"/>
                 </a:solidFill>
@@ -9360,7 +9410,123 @@
                 <a:ea typeface="Calibri"/>
                 <a:cs typeface="Calibri"/>
               </a:rPr>
-              <a:t>(records) that loops through the rows, maintains a running total, and returns it. Display the labelled total; the supplied data must produce 45.</a:t>
+              <a:t>(records), which uses a </a:t>
+            </a:r>
+            <a:r>
+              <a:rPr sz="2050" b="0">
+                <a:solidFill>
+                  <a:srgbClr val="1750EB"/>
+                </a:solidFill>
+                <a:latin typeface="JetBrains Mono"/>
+                <a:ea typeface="JetBrains Mono"/>
+                <a:cs typeface="JetBrains Mono"/>
+              </a:rPr>
+              <a:t>for</a:t>
+            </a:r>
+            <a:r>
+              <a:rPr sz="2400" b="0">
+                <a:solidFill>
+                  <a:srgbClr val="080808"/>
+                </a:solidFill>
+                <a:latin typeface="Calibri"/>
+                <a:ea typeface="Calibri"/>
+                <a:cs typeface="Calibri"/>
+              </a:rPr>
+              <a:t> loop to add each row's count to </a:t>
+            </a:r>
+            <a:r>
+              <a:rPr sz="2050" b="0">
+                <a:solidFill>
+                  <a:srgbClr val="6A1B9A"/>
+                </a:solidFill>
+                <a:highlight>
+                  <a:srgbClr val="ECEAF4"/>
+                </a:highlight>
+                <a:latin typeface="JetBrains Mono"/>
+                <a:ea typeface="JetBrains Mono"/>
+                <a:cs typeface="JetBrains Mono"/>
+              </a:rPr>
+              <a:t> total </a:t>
+            </a:r>
+            <a:r>
+              <a:rPr sz="2400" b="0">
+                <a:solidFill>
+                  <a:srgbClr val="080808"/>
+                </a:solidFill>
+                <a:latin typeface="Calibri"/>
+                <a:ea typeface="Calibri"/>
+                <a:cs typeface="Calibri"/>
+              </a:rPr>
+              <a:t>, then </a:t>
+            </a:r>
+            <a:r>
+              <a:rPr sz="2050" b="0">
+                <a:solidFill>
+                  <a:srgbClr val="1750EB"/>
+                </a:solidFill>
+                <a:latin typeface="JetBrains Mono"/>
+                <a:ea typeface="JetBrains Mono"/>
+                <a:cs typeface="JetBrains Mono"/>
+              </a:rPr>
+              <a:t>return</a:t>
+            </a:r>
+            <a:r>
+              <a:rPr sz="2400" b="0">
+                <a:solidFill>
+                  <a:srgbClr val="080808"/>
+                </a:solidFill>
+                <a:latin typeface="Calibri"/>
+                <a:ea typeface="Calibri"/>
+                <a:cs typeface="Calibri"/>
+              </a:rPr>
+              <a:t> </a:t>
+            </a:r>
+            <a:r>
+              <a:rPr sz="2050" b="0">
+                <a:solidFill>
+                  <a:srgbClr val="6A1B9A"/>
+                </a:solidFill>
+                <a:highlight>
+                  <a:srgbClr val="ECEAF4"/>
+                </a:highlight>
+                <a:latin typeface="JetBrains Mono"/>
+                <a:ea typeface="JetBrains Mono"/>
+                <a:cs typeface="JetBrains Mono"/>
+              </a:rPr>
+              <a:t> total </a:t>
+            </a:r>
+            <a:r>
+              <a:rPr sz="2400" b="0">
+                <a:solidFill>
+                  <a:srgbClr val="080808"/>
+                </a:solidFill>
+                <a:latin typeface="Calibri"/>
+                <a:ea typeface="Calibri"/>
+                <a:cs typeface="Calibri"/>
+              </a:rPr>
+              <a:t>. Display the club names, then </a:t>
+            </a:r>
+            <a:r>
+              <a:rPr sz="2050" b="0">
+                <a:solidFill>
+                  <a:srgbClr val="067D17"/>
+                </a:solidFill>
+                <a:latin typeface="JetBrains Mono"/>
+                <a:ea typeface="JetBrains Mono"/>
+                <a:cs typeface="JetBrains Mono"/>
+              </a:rPr>
+              <a:t>"Total members: 45"</a:t>
+            </a:r>
+            <a:r>
+              <a:rPr sz="2400" b="0">
+                <a:solidFill>
+                  <a:srgbClr val="080808"/>
+                </a:solidFill>
+                <a:latin typeface="Calibri"/>
+                <a:ea typeface="Calibri"/>
+                <a:cs typeface="Calibri"/>
+              </a:rPr>
+              <a:t>.</a:t>
             </a:r>
           </a:p>
         </p:txBody>
@@ -10278,7 +10444,7 @@
         </p:spPr>
         <p:txBody>
           <a:bodyPr xmlns:a="http://schemas.openxmlformats.org/drawingml/2006/main">
-            <a:normAutofit fontScale="82877"/>
+            <a:normAutofit fontScale="97536"/>
           </a:bodyPr>
           <a:lstStyle xmlns:a="http://schemas.openxmlformats.org/drawingml/2006/main"/>
           <a:p xmlns:a="http://schemas.openxmlformats.org/drawingml/2006/main">
@@ -10297,18 +10463,18 @@
                 <a:ea typeface="Calibri"/>
                 <a:cs typeface="Calibri"/>
               </a:rPr>
-              <a:t>Store [</a:t>
-            </a:r>
-            <a:r>
-              <a:rPr sz="2400" b="0">
-                <a:solidFill>
-                  <a:srgbClr val="067D17"/>
-                </a:solidFill>
-                <a:latin typeface="JetBrains Mono"/>
-                <a:ea typeface="JetBrains Mono"/>
-                <a:cs typeface="JetBrains Mono"/>
-              </a:rPr>
-              <a:t>"ari"</a:t>
+              <a:t>Create a 2D </a:t>
+            </a:r>
+            <a:r>
+              <a:rPr sz="2050" b="0">
+                <a:solidFill>
+                  <a:srgbClr val="1750EB"/>
+                </a:solidFill>
+                <a:latin typeface="JetBrains Mono"/>
+                <a:ea typeface="JetBrains Mono"/>
+                <a:cs typeface="JetBrains Mono"/>
+              </a:rPr>
+              <a:t>list</a:t>
             </a:r>
             <a:r>
               <a:rPr sz="2400" b="0">
@@ -10319,18 +10485,21 @@
                 <a:ea typeface="Calibri"/>
                 <a:cs typeface="Calibri"/>
               </a:rPr>
-              <a:t>, 7], [</a:t>
-            </a:r>
-            <a:r>
-              <a:rPr sz="2400" b="0">
-                <a:solidFill>
-                  <a:srgbClr val="067D17"/>
-                </a:solidFill>
-                <a:latin typeface="JetBrains Mono"/>
-                <a:ea typeface="JetBrains Mono"/>
-                <a:cs typeface="JetBrains Mono"/>
-              </a:rPr>
-              <a:t>"bao"</a:t>
+              <a:t> called </a:t>
+            </a:r>
+            <a:r>
+              <a:rPr sz="2050" b="0">
+                <a:solidFill>
+                  <a:srgbClr val="6A1B9A"/>
+                </a:solidFill>
+                <a:highlight>
+                  <a:srgbClr val="ECEAF4"/>
+                </a:highlight>
+                <a:latin typeface="JetBrains Mono"/>
+                <a:ea typeface="JetBrains Mono"/>
+                <a:cs typeface="JetBrains Mono"/>
+              </a:rPr>
+              <a:t> results </a:t>
             </a:r>
             <a:r>
               <a:rPr sz="2400" b="0">
@@ -10341,10 +10510,10 @@
                 <a:ea typeface="Calibri"/>
                 <a:cs typeface="Calibri"/>
               </a:rPr>
-              <a:t>, 9] and [</a:t>
-            </a:r>
-            <a:r>
-              <a:rPr sz="2400" b="0">
+              <a:t> with rows [</a:t>
+            </a:r>
+            <a:r>
+              <a:rPr sz="2050" b="0">
                 <a:solidFill>
                   <a:srgbClr val="067D17"/>
                 </a:solidFill>
@@ -10352,7 +10521,7 @@
                 <a:ea typeface="JetBrains Mono"/>
                 <a:cs typeface="JetBrains Mono"/>
               </a:rPr>
-              <a:t>"cleo"</a:t>
+              <a:t>"ari"</a:t>
             </a:r>
             <a:r>
               <a:rPr sz="2400" b="0">
@@ -10363,18 +10532,18 @@
                 <a:ea typeface="Calibri"/>
                 <a:cs typeface="Calibri"/>
               </a:rPr>
-              <a:t>, 8] in [results]. Write </a:t>
-            </a:r>
-            <a:r>
-              <a:rPr sz="2400" b="0">
-                <a:solidFill>
-                  <a:srgbClr val="1750EB"/>
-                </a:solidFill>
-                <a:latin typeface="JetBrains Mono"/>
-                <a:ea typeface="JetBrains Mono"/>
-                <a:cs typeface="JetBrains Mono"/>
-              </a:rPr>
-              <a:t>show_records</a:t>
+              <a:t>, 7], [</a:t>
+            </a:r>
+            <a:r>
+              <a:rPr sz="2050" b="0">
+                <a:solidFill>
+                  <a:srgbClr val="067D17"/>
+                </a:solidFill>
+                <a:latin typeface="JetBrains Mono"/>
+                <a:ea typeface="JetBrains Mono"/>
+                <a:cs typeface="JetBrains Mono"/>
+              </a:rPr>
+              <a:t>"bao"</a:t>
             </a:r>
             <a:r>
               <a:rPr sz="2400" b="0">
@@ -10385,18 +10554,18 @@
                 <a:ea typeface="Calibri"/>
                 <a:cs typeface="Calibri"/>
               </a:rPr>
-              <a:t>(records) to display every name and score. Write </a:t>
-            </a:r>
-            <a:r>
-              <a:rPr sz="2400" b="0">
-                <a:solidFill>
-                  <a:srgbClr val="1750EB"/>
-                </a:solidFill>
-                <a:latin typeface="JetBrains Mono"/>
-                <a:ea typeface="JetBrains Mono"/>
-                <a:cs typeface="JetBrains Mono"/>
-              </a:rPr>
-              <a:t>find_score</a:t>
+              <a:t>, 9] and [</a:t>
+            </a:r>
+            <a:r>
+              <a:rPr sz="2050" b="0">
+                <a:solidFill>
+                  <a:srgbClr val="067D17"/>
+                </a:solidFill>
+                <a:latin typeface="JetBrains Mono"/>
+                <a:ea typeface="JetBrains Mono"/>
+                <a:cs typeface="JetBrains Mono"/>
+              </a:rPr>
+              <a:t>"cleo"</a:t>
             </a:r>
             <a:r>
               <a:rPr sz="2400" b="0">
@@ -10407,10 +10576,10 @@
                 <a:ea typeface="Calibri"/>
                 <a:cs typeface="Calibri"/>
               </a:rPr>
-              <a:t>(records, target) to </a:t>
-            </a:r>
-            <a:r>
-              <a:rPr sz="2400" b="0">
+              <a:t>, 8]. Write </a:t>
+            </a:r>
+            <a:r>
+              <a:rPr sz="2050" b="0">
                 <a:solidFill>
                   <a:srgbClr val="1750EB"/>
                 </a:solidFill>
@@ -10418,7 +10587,7 @@
                 <a:ea typeface="JetBrains Mono"/>
                 <a:cs typeface="JetBrains Mono"/>
               </a:rPr>
-              <a:t>return</a:t>
+              <a:t>show_records</a:t>
             </a:r>
             <a:r>
               <a:rPr sz="2400" b="0">
@@ -10429,10 +10598,10 @@
                 <a:ea typeface="Calibri"/>
                 <a:cs typeface="Calibri"/>
               </a:rPr>
-              <a:t> the matching score or -1. Write </a:t>
-            </a:r>
-            <a:r>
-              <a:rPr sz="2400" b="0">
+              <a:t>(records) to display each name and score, and </a:t>
+            </a:r>
+            <a:r>
+              <a:rPr sz="2050" b="0">
                 <a:solidFill>
                   <a:srgbClr val="1750EB"/>
                 </a:solidFill>
@@ -10440,7 +10609,7 @@
                 <a:ea typeface="JetBrains Mono"/>
                 <a:cs typeface="JetBrains Mono"/>
               </a:rPr>
-              <a:t>highest_score</a:t>
+              <a:t>find_score</a:t>
             </a:r>
             <a:r>
               <a:rPr sz="2400" b="0">
@@ -10451,10 +10620,10 @@
                 <a:ea typeface="Calibri"/>
                 <a:cs typeface="Calibri"/>
               </a:rPr>
-              <a:t>(records) to </a:t>
-            </a:r>
-            <a:r>
-              <a:rPr sz="2400" b="0">
+              <a:t>(records, target) to </a:t>
+            </a:r>
+            <a:r>
+              <a:rPr sz="2050" b="0">
                 <a:solidFill>
                   <a:srgbClr val="1750EB"/>
                 </a:solidFill>
@@ -10473,18 +10642,18 @@
                 <a:ea typeface="Calibri"/>
                 <a:cs typeface="Calibri"/>
               </a:rPr>
-              <a:t> the highest score. In the main program, call all three functions. Test </a:t>
-            </a:r>
-            <a:r>
-              <a:rPr sz="2400" b="0">
-                <a:solidFill>
-                  <a:srgbClr val="067D17"/>
-                </a:solidFill>
-                <a:latin typeface="JetBrains Mono"/>
-                <a:ea typeface="JetBrains Mono"/>
-                <a:cs typeface="JetBrains Mono"/>
-              </a:rPr>
-              <a:t>"Bao"</a:t>
+              <a:t> a matching score, or </a:t>
+            </a:r>
+            <a:r>
+              <a:rPr sz="2050" b="0">
+                <a:solidFill>
+                  <a:srgbClr val="1750EB"/>
+                </a:solidFill>
+                <a:latin typeface="JetBrains Mono"/>
+                <a:ea typeface="JetBrains Mono"/>
+                <a:cs typeface="JetBrains Mono"/>
+              </a:rPr>
+              <a:t>return</a:t>
             </a:r>
             <a:r>
               <a:rPr sz="2400" b="0">
@@ -10495,18 +10664,18 @@
                 <a:ea typeface="Calibri"/>
                 <a:cs typeface="Calibri"/>
               </a:rPr>
-              <a:t>; display </a:t>
-            </a:r>
-            <a:r>
-              <a:rPr sz="2400" b="0">
-                <a:solidFill>
-                  <a:srgbClr val="067D17"/>
-                </a:solidFill>
-                <a:latin typeface="JetBrains Mono"/>
-                <a:ea typeface="JetBrains Mono"/>
-                <a:cs typeface="JetBrains Mono"/>
-              </a:rPr>
-              <a:t>"Score: 9"</a:t>
+              <a:t> -1. Call </a:t>
+            </a:r>
+            <a:r>
+              <a:rPr sz="2050" b="0">
+                <a:solidFill>
+                  <a:srgbClr val="1750EB"/>
+                </a:solidFill>
+                <a:latin typeface="JetBrains Mono"/>
+                <a:ea typeface="JetBrains Mono"/>
+                <a:cs typeface="JetBrains Mono"/>
+              </a:rPr>
+              <a:t>show_records()</a:t>
             </a:r>
             <a:r>
               <a:rPr sz="2400" b="0">
@@ -10517,10 +10686,10 @@
                 <a:ea typeface="Calibri"/>
                 <a:cs typeface="Calibri"/>
               </a:rPr>
-              <a:t> and </a:t>
-            </a:r>
-            <a:r>
-              <a:rPr sz="2400" b="0">
+              <a:t>, ask for a name, then display </a:t>
+            </a:r>
+            <a:r>
+              <a:rPr sz="2050" b="0">
                 <a:solidFill>
                   <a:srgbClr val="067D17"/>
                 </a:solidFill>
@@ -10528,7 +10697,7 @@
                 <a:ea typeface="JetBrains Mono"/>
                 <a:cs typeface="JetBrains Mono"/>
               </a:rPr>
-              <a:t>"Highest score: 9"</a:t>
+              <a:t>"Score:"</a:t>
             </a:r>
             <a:r>
               <a:rPr sz="2400" b="0">
@@ -10539,10 +10708,10 @@
                 <a:ea typeface="Calibri"/>
                 <a:cs typeface="Calibri"/>
               </a:rPr>
-              <a:t>. Test </a:t>
-            </a:r>
-            <a:r>
-              <a:rPr sz="2400" b="0">
+              <a:t> with the result, or </a:t>
+            </a:r>
+            <a:r>
+              <a:rPr sz="2050" b="0">
                 <a:solidFill>
                   <a:srgbClr val="067D17"/>
                 </a:solidFill>
@@ -10550,7 +10719,7 @@
                 <a:ea typeface="JetBrains Mono"/>
                 <a:cs typeface="JetBrains Mono"/>
               </a:rPr>
-              <a:t>"Mina"</a:t>
+              <a:t>"Name not found."</a:t>
             </a:r>
             <a:r>
               <a:rPr sz="2400" b="0">
@@ -10561,51 +10730,7 @@
                 <a:ea typeface="Calibri"/>
                 <a:cs typeface="Calibri"/>
               </a:rPr>
-              <a:t>; display </a:t>
-            </a:r>
-            <a:r>
-              <a:rPr sz="2400" b="0">
-                <a:solidFill>
-                  <a:srgbClr val="067D17"/>
-                </a:solidFill>
-                <a:latin typeface="JetBrains Mono"/>
-                <a:ea typeface="JetBrains Mono"/>
-                <a:cs typeface="JetBrains Mono"/>
-              </a:rPr>
-              <a:t>"Name not found."</a:t>
-            </a:r>
-            <a:r>
-              <a:rPr sz="2400" b="0">
-                <a:solidFill>
-                  <a:srgbClr val="080808"/>
-                </a:solidFill>
-                <a:latin typeface="Calibri"/>
-                <a:ea typeface="Calibri"/>
-                <a:cs typeface="Calibri"/>
-              </a:rPr>
-              <a:t> and </a:t>
-            </a:r>
-            <a:r>
-              <a:rPr sz="2400" b="0">
-                <a:solidFill>
-                  <a:srgbClr val="067D17"/>
-                </a:solidFill>
-                <a:latin typeface="JetBrains Mono"/>
-                <a:ea typeface="JetBrains Mono"/>
-                <a:cs typeface="JetBrains Mono"/>
-              </a:rPr>
-              <a:t>"Highest score: 9"</a:t>
-            </a:r>
-            <a:r>
-              <a:rPr sz="2400" b="0">
-                <a:solidFill>
-                  <a:srgbClr val="080808"/>
-                </a:solidFill>
-                <a:latin typeface="Calibri"/>
-                <a:ea typeface="Calibri"/>
-                <a:cs typeface="Calibri"/>
-              </a:rPr>
-              <a:t>.</a:t>
+              <a:t> for -1.</a:t>
             </a:r>
           </a:p>
         </p:txBody>

--- a/Mapped Curriculum Lessons/Grade 8/Lesson 35 - Functions with 2D Data/Functions with 2D Data - Slides.pptx
+++ b/Mapped Curriculum Lessons/Grade 8/Lesson 35 - Functions with 2D Data/Functions with 2D Data - Slides.pptx
@@ -2,28 +2,28 @@
 <file path=ppt/presentation.xml><?xml version="1.0" encoding="utf-8"?>
 <p:presentation xmlns:p="http://schemas.openxmlformats.org/presentationml/2006/main" embedTrueTypeFonts="1" saveSubsetFonts="0">
   <p:sldMasterIdLst>
-    <p:sldMasterId xmlns:r="http://schemas.openxmlformats.org/officeDocument/2006/relationships" id="2147483648" r:id="R27f80a0e8ed64dcb"/>
+    <p:sldMasterId xmlns:r="http://schemas.openxmlformats.org/officeDocument/2006/relationships" id="2147483648" r:id="R42408f78a4684f02"/>
   </p:sldMasterIdLst>
   <p:notesMasterIdLst>
-    <p:notesMasterId xmlns:r="http://schemas.openxmlformats.org/officeDocument/2006/relationships" r:id="Rccd99e5593824a9a"/>
+    <p:notesMasterId xmlns:r="http://schemas.openxmlformats.org/officeDocument/2006/relationships" r:id="R8fd0c42d01e54166"/>
   </p:notesMasterIdLst>
   <p:sldIdLst>
-    <p:sldId xmlns:r="http://schemas.openxmlformats.org/officeDocument/2006/relationships" id="256" r:id="Rfb3799cca7464c08"/>
-    <p:sldId xmlns:r="http://schemas.openxmlformats.org/officeDocument/2006/relationships" id="257" r:id="Recd283b7740a40d5"/>
-    <p:sldId xmlns:r="http://schemas.openxmlformats.org/officeDocument/2006/relationships" id="258" r:id="R3f34c840779c4507"/>
-    <p:sldId xmlns:r="http://schemas.openxmlformats.org/officeDocument/2006/relationships" id="259" r:id="R69485a76aad64280"/>
-    <p:sldId xmlns:r="http://schemas.openxmlformats.org/officeDocument/2006/relationships" id="260" r:id="R90490bb897574422"/>
-    <p:sldId xmlns:r="http://schemas.openxmlformats.org/officeDocument/2006/relationships" id="261" r:id="R60fe02aeb5324890"/>
-    <p:sldId xmlns:r="http://schemas.openxmlformats.org/officeDocument/2006/relationships" id="262" r:id="R4d8f225e552841ba"/>
-    <p:sldId xmlns:r="http://schemas.openxmlformats.org/officeDocument/2006/relationships" id="263" r:id="R2ba7d1281ecf442d"/>
-    <p:sldId xmlns:r="http://schemas.openxmlformats.org/officeDocument/2006/relationships" id="264" r:id="R0e0a8b95ebb14245"/>
+    <p:sldId xmlns:r="http://schemas.openxmlformats.org/officeDocument/2006/relationships" id="256" r:id="R8f8315d66a574647"/>
+    <p:sldId xmlns:r="http://schemas.openxmlformats.org/officeDocument/2006/relationships" id="257" r:id="R488aa12ffd9b4124"/>
+    <p:sldId xmlns:r="http://schemas.openxmlformats.org/officeDocument/2006/relationships" id="258" r:id="R29c2960608904f6c"/>
+    <p:sldId xmlns:r="http://schemas.openxmlformats.org/officeDocument/2006/relationships" id="259" r:id="R2b2eeb6f4c2844b1"/>
+    <p:sldId xmlns:r="http://schemas.openxmlformats.org/officeDocument/2006/relationships" id="260" r:id="Rf0530f888e934dbd"/>
+    <p:sldId xmlns:r="http://schemas.openxmlformats.org/officeDocument/2006/relationships" id="261" r:id="Rd88ebc1878814f7a"/>
+    <p:sldId xmlns:r="http://schemas.openxmlformats.org/officeDocument/2006/relationships" id="262" r:id="Re26311cedd044554"/>
+    <p:sldId xmlns:r="http://schemas.openxmlformats.org/officeDocument/2006/relationships" id="263" r:id="R9de2d67f1f614ac1"/>
+    <p:sldId xmlns:r="http://schemas.openxmlformats.org/officeDocument/2006/relationships" id="264" r:id="R525ee2f3677844fe"/>
   </p:sldIdLst>
   <p:sldSz cx="12192000" cy="6858000"/>
   <p:notesSz cx="6858000" cy="9144000"/>
   <p:embeddedFontLst>
     <p:embeddedFont>
       <p:font typeface="JetBrains Mono"/>
-      <p:regular xmlns:r="http://schemas.openxmlformats.org/officeDocument/2006/relationships" r:id="R9857a008e39547dc"/>
+      <p:regular xmlns:r="http://schemas.openxmlformats.org/officeDocument/2006/relationships" r:id="Rd1ed92c673d64514"/>
     </p:embeddedFont>
   </p:embeddedFontLst>
 </p:presentation>
@@ -1071,7 +1071,7 @@
           <p:nvPr/>
         </p:nvPicPr>
         <p:blipFill rotWithShape="1">
-          <a:blip xmlns:r="http://schemas.openxmlformats.org/officeDocument/2006/relationships" xmlns:a="http://schemas.openxmlformats.org/drawingml/2006/main" r:embed="R1ce019d0fa534015"/>
+          <a:blip xmlns:r="http://schemas.openxmlformats.org/officeDocument/2006/relationships" xmlns:a="http://schemas.openxmlformats.org/drawingml/2006/main" r:embed="Rc250a9fc147647f2"/>
           <a:stretch xmlns:a="http://schemas.openxmlformats.org/drawingml/2006/main"/>
         </p:blipFill>
         <p:spPr>
@@ -1451,7 +1451,7 @@
           <p:nvPr/>
         </p:nvPicPr>
         <p:blipFill rotWithShape="1">
-          <a:blip xmlns:r="http://schemas.openxmlformats.org/officeDocument/2006/relationships" xmlns:a="http://schemas.openxmlformats.org/drawingml/2006/main" r:embed="Rf60df1c11dd64514">
+          <a:blip xmlns:r="http://schemas.openxmlformats.org/officeDocument/2006/relationships" xmlns:a="http://schemas.openxmlformats.org/drawingml/2006/main" r:embed="R09b0468e6d54419e">
             <a:alphaModFix amt="28000"/>
           </a:blip>
           <a:stretch xmlns:a="http://schemas.openxmlformats.org/drawingml/2006/main"/>
@@ -1664,7 +1664,7 @@
           <p:nvPr/>
         </p:nvPicPr>
         <p:blipFill rotWithShape="1">
-          <a:blip xmlns:r="http://schemas.openxmlformats.org/officeDocument/2006/relationships" xmlns:a="http://schemas.openxmlformats.org/drawingml/2006/main" r:embed="R2208f0382d734efb">
+          <a:blip xmlns:r="http://schemas.openxmlformats.org/officeDocument/2006/relationships" xmlns:a="http://schemas.openxmlformats.org/drawingml/2006/main" r:embed="R5f74e88cfb3f45ff">
             <a:alphaModFix amt="28000"/>
           </a:blip>
           <a:stretch xmlns:a="http://schemas.openxmlformats.org/drawingml/2006/main"/>
@@ -1899,7 +1899,7 @@
           <p:nvPr/>
         </p:nvPicPr>
         <p:blipFill rotWithShape="1">
-          <a:blip xmlns:r="http://schemas.openxmlformats.org/officeDocument/2006/relationships" xmlns:a="http://schemas.openxmlformats.org/drawingml/2006/main" r:embed="R4f89a1cea6764e22">
+          <a:blip xmlns:r="http://schemas.openxmlformats.org/officeDocument/2006/relationships" xmlns:a="http://schemas.openxmlformats.org/drawingml/2006/main" r:embed="R072558232f7e48a0">
             <a:alphaModFix amt="28000"/>
           </a:blip>
           <a:stretch xmlns:a="http://schemas.openxmlformats.org/drawingml/2006/main"/>
@@ -2176,7 +2176,7 @@
           <p:nvPr/>
         </p:nvPicPr>
         <p:blipFill rotWithShape="1">
-          <a:blip xmlns:r="http://schemas.openxmlformats.org/officeDocument/2006/relationships" xmlns:a="http://schemas.openxmlformats.org/drawingml/2006/main" r:embed="R0fe8362ceb0c4063">
+          <a:blip xmlns:r="http://schemas.openxmlformats.org/officeDocument/2006/relationships" xmlns:a="http://schemas.openxmlformats.org/drawingml/2006/main" r:embed="Rbbed3be90ca041ea">
             <a:alphaModFix amt="28000"/>
           </a:blip>
           <a:stretch xmlns:a="http://schemas.openxmlformats.org/drawingml/2006/main"/>
@@ -2451,7 +2451,7 @@
           <p:nvPr/>
         </p:nvPicPr>
         <p:blipFill rotWithShape="1">
-          <a:blip xmlns:r="http://schemas.openxmlformats.org/officeDocument/2006/relationships" xmlns:a="http://schemas.openxmlformats.org/drawingml/2006/main" r:embed="R13a2b571e1514a77">
+          <a:blip xmlns:r="http://schemas.openxmlformats.org/officeDocument/2006/relationships" xmlns:a="http://schemas.openxmlformats.org/drawingml/2006/main" r:embed="R5745a35b809e4e7c">
             <a:alphaModFix amt="28000"/>
           </a:blip>
           <a:stretch xmlns:a="http://schemas.openxmlformats.org/drawingml/2006/main"/>
@@ -2875,7 +2875,7 @@
           <p:nvPr/>
         </p:nvPicPr>
         <p:blipFill rotWithShape="1">
-          <a:blip xmlns:r="http://schemas.openxmlformats.org/officeDocument/2006/relationships" xmlns:a="http://schemas.openxmlformats.org/drawingml/2006/main" r:embed="Rcef895a935c64f3c">
+          <a:blip xmlns:r="http://schemas.openxmlformats.org/officeDocument/2006/relationships" xmlns:a="http://schemas.openxmlformats.org/drawingml/2006/main" r:embed="R495ff705e01f46e4">
             <a:alphaModFix amt="28000"/>
           </a:blip>
           <a:stretch xmlns:a="http://schemas.openxmlformats.org/drawingml/2006/main"/>
@@ -3016,7 +3016,7 @@
           <p:nvPr/>
         </p:nvPicPr>
         <p:blipFill rotWithShape="1">
-          <a:blip xmlns:r="http://schemas.openxmlformats.org/officeDocument/2006/relationships" xmlns:a="http://schemas.openxmlformats.org/drawingml/2006/main" r:embed="R373d3bb7c55c42a0">
+          <a:blip xmlns:r="http://schemas.openxmlformats.org/officeDocument/2006/relationships" xmlns:a="http://schemas.openxmlformats.org/drawingml/2006/main" r:embed="Raa3df1c065564321">
             <a:alphaModFix amt="28000"/>
           </a:blip>
           <a:stretch xmlns:a="http://schemas.openxmlformats.org/drawingml/2006/main"/>
@@ -3130,7 +3130,7 @@
           <p:nvPr/>
         </p:nvPicPr>
         <p:blipFill rotWithShape="1">
-          <a:blip xmlns:r="http://schemas.openxmlformats.org/officeDocument/2006/relationships" xmlns:a="http://schemas.openxmlformats.org/drawingml/2006/main" r:embed="R2eec606ceded4e87">
+          <a:blip xmlns:r="http://schemas.openxmlformats.org/officeDocument/2006/relationships" xmlns:a="http://schemas.openxmlformats.org/drawingml/2006/main" r:embed="R47c4ecfb16fd47d7">
             <a:alphaModFix amt="28000"/>
           </a:blip>
           <a:stretch xmlns:a="http://schemas.openxmlformats.org/drawingml/2006/main"/>
@@ -3457,7 +3457,7 @@
           <p:nvPr/>
         </p:nvPicPr>
         <p:blipFill rotWithShape="1">
-          <a:blip xmlns:r="http://schemas.openxmlformats.org/officeDocument/2006/relationships" xmlns:a="http://schemas.openxmlformats.org/drawingml/2006/main" r:embed="R0bae87affe524b4a">
+          <a:blip xmlns:r="http://schemas.openxmlformats.org/officeDocument/2006/relationships" xmlns:a="http://schemas.openxmlformats.org/drawingml/2006/main" r:embed="R6bed49eaafb44d37">
             <a:alphaModFix amt="28000"/>
           </a:blip>
           <a:stretch xmlns:a="http://schemas.openxmlformats.org/drawingml/2006/main"/>
@@ -3745,7 +3745,7 @@
           <p:nvPr/>
         </p:nvPicPr>
         <p:blipFill rotWithShape="1">
-          <a:blip xmlns:r="http://schemas.openxmlformats.org/officeDocument/2006/relationships" xmlns:a="http://schemas.openxmlformats.org/drawingml/2006/main" r:embed="R0ac8a1cbc6ed4231">
+          <a:blip xmlns:r="http://schemas.openxmlformats.org/officeDocument/2006/relationships" xmlns:a="http://schemas.openxmlformats.org/drawingml/2006/main" r:embed="R73fe433d0f31473e">
             <a:alphaModFix amt="28000"/>
           </a:blip>
           <a:stretch xmlns:a="http://schemas.openxmlformats.org/drawingml/2006/main"/>
@@ -3982,17 +3982,17 @@
   </p:cSld>
   <p:clrMap bg1="lt1" tx1="dk1" bg2="lt2" tx2="dk2" accent1="accent1" accent2="accent2" accent3="accent3" accent4="accent4" accent5="accent5" accent6="accent6" hlink="hlink" folHlink="folHlink"/>
   <p:sldLayoutIdLst>
-    <p:sldLayoutId xmlns:r="http://schemas.openxmlformats.org/officeDocument/2006/relationships" id="2147483649" r:id="R39916d4c65704d67"/>
-    <p:sldLayoutId xmlns:r="http://schemas.openxmlformats.org/officeDocument/2006/relationships" id="2147483650" r:id="Ra1324879443844d2"/>
-    <p:sldLayoutId xmlns:r="http://schemas.openxmlformats.org/officeDocument/2006/relationships" id="2147483651" r:id="R9f95af7e5b8f4449"/>
-    <p:sldLayoutId xmlns:r="http://schemas.openxmlformats.org/officeDocument/2006/relationships" id="2147483652" r:id="R80155c7b4c6340f6"/>
-    <p:sldLayoutId xmlns:r="http://schemas.openxmlformats.org/officeDocument/2006/relationships" id="2147483653" r:id="R8afd9b2a910e482e"/>
-    <p:sldLayoutId xmlns:r="http://schemas.openxmlformats.org/officeDocument/2006/relationships" id="2147483654" r:id="R6b9720d207034077"/>
-    <p:sldLayoutId xmlns:r="http://schemas.openxmlformats.org/officeDocument/2006/relationships" id="2147483655" r:id="R8b3a1e3ee79c42fe"/>
-    <p:sldLayoutId xmlns:r="http://schemas.openxmlformats.org/officeDocument/2006/relationships" id="2147483656" r:id="R21d0d590a5b84332"/>
-    <p:sldLayoutId xmlns:r="http://schemas.openxmlformats.org/officeDocument/2006/relationships" id="2147483657" r:id="R11678d4d3bad4898"/>
-    <p:sldLayoutId xmlns:r="http://schemas.openxmlformats.org/officeDocument/2006/relationships" id="2147483658" r:id="R5d558c4fa5bf473c"/>
-    <p:sldLayoutId xmlns:r="http://schemas.openxmlformats.org/officeDocument/2006/relationships" id="2147483659" r:id="R3d5dd4a05b4843f6"/>
+    <p:sldLayoutId xmlns:r="http://schemas.openxmlformats.org/officeDocument/2006/relationships" id="2147483649" r:id="R65f8823cb3064763"/>
+    <p:sldLayoutId xmlns:r="http://schemas.openxmlformats.org/officeDocument/2006/relationships" id="2147483650" r:id="R21ce3075100442a9"/>
+    <p:sldLayoutId xmlns:r="http://schemas.openxmlformats.org/officeDocument/2006/relationships" id="2147483651" r:id="R207f7366fd204142"/>
+    <p:sldLayoutId xmlns:r="http://schemas.openxmlformats.org/officeDocument/2006/relationships" id="2147483652" r:id="R2ec6ad0d41b34b73"/>
+    <p:sldLayoutId xmlns:r="http://schemas.openxmlformats.org/officeDocument/2006/relationships" id="2147483653" r:id="Re20dbf18bf6642c8"/>
+    <p:sldLayoutId xmlns:r="http://schemas.openxmlformats.org/officeDocument/2006/relationships" id="2147483654" r:id="R032149f704204d7a"/>
+    <p:sldLayoutId xmlns:r="http://schemas.openxmlformats.org/officeDocument/2006/relationships" id="2147483655" r:id="R119687909aef4c6b"/>
+    <p:sldLayoutId xmlns:r="http://schemas.openxmlformats.org/officeDocument/2006/relationships" id="2147483656" r:id="Ra04bcab00eec4787"/>
+    <p:sldLayoutId xmlns:r="http://schemas.openxmlformats.org/officeDocument/2006/relationships" id="2147483657" r:id="R7abd61a583b74338"/>
+    <p:sldLayoutId xmlns:r="http://schemas.openxmlformats.org/officeDocument/2006/relationships" id="2147483658" r:id="R33b20e87000a4feb"/>
+    <p:sldLayoutId xmlns:r="http://schemas.openxmlformats.org/officeDocument/2006/relationships" id="2147483659" r:id="R1da3d3cbe5a44f49"/>
   </p:sldLayoutIdLst>
   <p:hf hdr="0" ftr="0" dt="0"/>
   <p:txStyles>
@@ -4898,7 +4898,7 @@
             <a:r>
               <a:rPr sz="2400">
                 <a:solidFill>
-                  <a:srgbClr val="1750EB"/>
+                  <a:srgbClr val="C45E00"/>
                 </a:solidFill>
                 <a:latin typeface="JetBrains Mono"/>
                 <a:ea typeface="JetBrains Mono"/>
@@ -4939,7 +4939,7 @@
             <a:r>
               <a:rPr sz="2400">
                 <a:solidFill>
-                  <a:srgbClr val="1750EB"/>
+                  <a:srgbClr val="C45E00"/>
                 </a:solidFill>
                 <a:latin typeface="JetBrains Mono"/>
                 <a:ea typeface="JetBrains Mono"/>
@@ -4961,7 +4961,7 @@
             <a:r>
               <a:rPr sz="2400">
                 <a:solidFill>
-                  <a:srgbClr val="1750EB"/>
+                  <a:srgbClr val="C45E00"/>
                 </a:solidFill>
                 <a:latin typeface="JetBrains Mono"/>
                 <a:ea typeface="JetBrains Mono"/>
@@ -5002,7 +5002,7 @@
             <a:r>
               <a:rPr sz="2400">
                 <a:solidFill>
-                  <a:srgbClr val="1750EB"/>
+                  <a:srgbClr val="C45E00"/>
                 </a:solidFill>
                 <a:latin typeface="JetBrains Mono"/>
                 <a:ea typeface="JetBrains Mono"/>
@@ -5065,7 +5065,7 @@
             <a:r>
               <a:rPr sz="2400">
                 <a:solidFill>
-                  <a:srgbClr val="1750EB"/>
+                  <a:srgbClr val="C45E00"/>
                 </a:solidFill>
                 <a:latin typeface="JetBrains Mono"/>
                 <a:ea typeface="JetBrains Mono"/>
@@ -5106,7 +5106,7 @@
             <a:r>
               <a:rPr sz="2400">
                 <a:solidFill>
-                  <a:srgbClr val="1750EB"/>
+                  <a:srgbClr val="C45E00"/>
                 </a:solidFill>
                 <a:latin typeface="JetBrains Mono"/>
                 <a:ea typeface="JetBrains Mono"/>
@@ -5221,7 +5221,7 @@
             <a:r>
               <a:rPr sz="2400">
                 <a:solidFill>
-                  <a:srgbClr val="1750EB"/>
+                  <a:srgbClr val="C45E00"/>
                 </a:solidFill>
                 <a:latin typeface="JetBrains Mono"/>
                 <a:ea typeface="JetBrains Mono"/>
@@ -5243,7 +5243,7 @@
             <a:r>
               <a:rPr sz="2400">
                 <a:solidFill>
-                  <a:srgbClr val="1750EB"/>
+                  <a:srgbClr val="C45E00"/>
                 </a:solidFill>
                 <a:latin typeface="JetBrains Mono"/>
                 <a:ea typeface="JetBrains Mono"/>
@@ -5725,7 +5725,7 @@
             <a:r>
               <a:rPr sz="2400">
                 <a:solidFill>
-                  <a:srgbClr val="1750EB"/>
+                  <a:srgbClr val="C45E00"/>
                 </a:solidFill>
                 <a:latin typeface="JetBrains Mono"/>
                 <a:ea typeface="JetBrains Mono"/>
@@ -5766,7 +5766,7 @@
             <a:r>
               <a:rPr sz="2400">
                 <a:solidFill>
-                  <a:srgbClr val="1750EB"/>
+                  <a:srgbClr val="C45E00"/>
                 </a:solidFill>
                 <a:latin typeface="JetBrains Mono"/>
                 <a:ea typeface="JetBrains Mono"/>
@@ -5788,7 +5788,7 @@
             <a:r>
               <a:rPr sz="2400">
                 <a:solidFill>
-                  <a:srgbClr val="1750EB"/>
+                  <a:srgbClr val="C45E00"/>
                 </a:solidFill>
                 <a:latin typeface="JetBrains Mono"/>
                 <a:ea typeface="JetBrains Mono"/>
@@ -5829,7 +5829,7 @@
             <a:r>
               <a:rPr sz="2400">
                 <a:solidFill>
-                  <a:srgbClr val="1750EB"/>
+                  <a:srgbClr val="C45E00"/>
                 </a:solidFill>
                 <a:latin typeface="JetBrains Mono"/>
                 <a:ea typeface="JetBrains Mono"/>
@@ -5892,7 +5892,7 @@
             <a:r>
               <a:rPr sz="2400">
                 <a:solidFill>
-                  <a:srgbClr val="1750EB"/>
+                  <a:srgbClr val="C45E00"/>
                 </a:solidFill>
                 <a:latin typeface="JetBrains Mono"/>
                 <a:ea typeface="JetBrains Mono"/>
@@ -5933,7 +5933,7 @@
             <a:r>
               <a:rPr sz="2400">
                 <a:solidFill>
-                  <a:srgbClr val="1750EB"/>
+                  <a:srgbClr val="C45E00"/>
                 </a:solidFill>
                 <a:latin typeface="JetBrains Mono"/>
                 <a:ea typeface="JetBrains Mono"/>
@@ -6048,7 +6048,7 @@
             <a:r>
               <a:rPr sz="2400">
                 <a:solidFill>
-                  <a:srgbClr val="1750EB"/>
+                  <a:srgbClr val="C45E00"/>
                 </a:solidFill>
                 <a:latin typeface="JetBrains Mono"/>
                 <a:ea typeface="JetBrains Mono"/>
@@ -6070,7 +6070,7 @@
             <a:r>
               <a:rPr sz="2400">
                 <a:solidFill>
-                  <a:srgbClr val="1750EB"/>
+                  <a:srgbClr val="C45E00"/>
                 </a:solidFill>
                 <a:latin typeface="JetBrains Mono"/>
                 <a:ea typeface="JetBrains Mono"/>
@@ -6552,7 +6552,7 @@
             <a:r>
               <a:rPr sz="2400">
                 <a:solidFill>
-                  <a:srgbClr val="1750EB"/>
+                  <a:srgbClr val="C45E00"/>
                 </a:solidFill>
                 <a:latin typeface="JetBrains Mono"/>
                 <a:ea typeface="JetBrains Mono"/>
@@ -6593,7 +6593,7 @@
             <a:r>
               <a:rPr sz="2400">
                 <a:solidFill>
-                  <a:srgbClr val="1750EB"/>
+                  <a:srgbClr val="C45E00"/>
                 </a:solidFill>
                 <a:latin typeface="JetBrains Mono"/>
                 <a:ea typeface="JetBrains Mono"/>
@@ -6615,7 +6615,7 @@
             <a:r>
               <a:rPr sz="2400">
                 <a:solidFill>
-                  <a:srgbClr val="1750EB"/>
+                  <a:srgbClr val="C45E00"/>
                 </a:solidFill>
                 <a:latin typeface="JetBrains Mono"/>
                 <a:ea typeface="JetBrains Mono"/>
@@ -6656,7 +6656,7 @@
             <a:r>
               <a:rPr sz="2400">
                 <a:solidFill>
-                  <a:srgbClr val="1750EB"/>
+                  <a:srgbClr val="C45E00"/>
                 </a:solidFill>
                 <a:latin typeface="JetBrains Mono"/>
                 <a:ea typeface="JetBrains Mono"/>
@@ -6719,7 +6719,7 @@
             <a:r>
               <a:rPr sz="2400">
                 <a:solidFill>
-                  <a:srgbClr val="1750EB"/>
+                  <a:srgbClr val="C45E00"/>
                 </a:solidFill>
                 <a:latin typeface="JetBrains Mono"/>
                 <a:ea typeface="JetBrains Mono"/>
@@ -6760,7 +6760,7 @@
             <a:r>
               <a:rPr sz="2400">
                 <a:solidFill>
-                  <a:srgbClr val="1750EB"/>
+                  <a:srgbClr val="C45E00"/>
                 </a:solidFill>
                 <a:latin typeface="JetBrains Mono"/>
                 <a:ea typeface="JetBrains Mono"/>
@@ -6875,7 +6875,7 @@
             <a:r>
               <a:rPr sz="2400">
                 <a:solidFill>
-                  <a:srgbClr val="1750EB"/>
+                  <a:srgbClr val="C45E00"/>
                 </a:solidFill>
                 <a:latin typeface="JetBrains Mono"/>
                 <a:ea typeface="JetBrains Mono"/>
@@ -6897,7 +6897,7 @@
             <a:r>
               <a:rPr sz="2400">
                 <a:solidFill>
-                  <a:srgbClr val="1750EB"/>
+                  <a:srgbClr val="C45E00"/>
                 </a:solidFill>
                 <a:latin typeface="JetBrains Mono"/>
                 <a:ea typeface="JetBrains Mono"/>
@@ -7630,7 +7630,7 @@
             <a:r>
               <a:rPr sz="1100">
                 <a:solidFill>
-                  <a:srgbClr val="1750EB"/>
+                  <a:srgbClr val="C45E00"/>
                 </a:solidFill>
                 <a:latin typeface="JetBrains Mono"/>
                 <a:ea typeface="JetBrains Mono"/>
@@ -7673,7 +7673,7 @@
             <a:r>
               <a:rPr sz="1100">
                 <a:solidFill>
-                  <a:srgbClr val="1750EB"/>
+                  <a:srgbClr val="C45E00"/>
                 </a:solidFill>
                 <a:latin typeface="JetBrains Mono"/>
                 <a:ea typeface="JetBrains Mono"/>
@@ -7695,7 +7695,7 @@
             <a:r>
               <a:rPr sz="1100">
                 <a:solidFill>
-                  <a:srgbClr val="1750EB"/>
+                  <a:srgbClr val="C45E00"/>
                 </a:solidFill>
                 <a:latin typeface="JetBrains Mono"/>
                 <a:ea typeface="JetBrains Mono"/>
@@ -7738,7 +7738,7 @@
             <a:r>
               <a:rPr sz="1100">
                 <a:solidFill>
-                  <a:srgbClr val="1750EB"/>
+                  <a:srgbClr val="C45E00"/>
                 </a:solidFill>
                 <a:latin typeface="JetBrains Mono"/>
                 <a:ea typeface="JetBrains Mono"/>
@@ -7803,7 +7803,7 @@
             <a:r>
               <a:rPr sz="1100">
                 <a:solidFill>
-                  <a:srgbClr val="1750EB"/>
+                  <a:srgbClr val="C45E00"/>
                 </a:solidFill>
                 <a:latin typeface="JetBrains Mono"/>
                 <a:ea typeface="JetBrains Mono"/>
@@ -7846,7 +7846,7 @@
             <a:r>
               <a:rPr sz="1100">
                 <a:solidFill>
-                  <a:srgbClr val="1750EB"/>
+                  <a:srgbClr val="C45E00"/>
                 </a:solidFill>
                 <a:latin typeface="JetBrains Mono"/>
                 <a:ea typeface="JetBrains Mono"/>
@@ -7965,7 +7965,7 @@
             <a:r>
               <a:rPr sz="1100">
                 <a:solidFill>
-                  <a:srgbClr val="1750EB"/>
+                  <a:srgbClr val="C45E00"/>
                 </a:solidFill>
                 <a:latin typeface="JetBrains Mono"/>
                 <a:ea typeface="JetBrains Mono"/>
@@ -7987,7 +7987,7 @@
             <a:r>
               <a:rPr sz="1100">
                 <a:solidFill>
-                  <a:srgbClr val="1750EB"/>
+                  <a:srgbClr val="C45E00"/>
                 </a:solidFill>
                 <a:latin typeface="JetBrains Mono"/>
                 <a:ea typeface="JetBrains Mono"/>
@@ -8727,7 +8727,7 @@
             <a:r>
               <a:rPr sz="1100">
                 <a:solidFill>
-                  <a:srgbClr val="1750EB"/>
+                  <a:srgbClr val="C45E00"/>
                 </a:solidFill>
                 <a:latin typeface="JetBrains Mono"/>
                 <a:ea typeface="JetBrains Mono"/>
@@ -8770,7 +8770,7 @@
             <a:r>
               <a:rPr sz="1100">
                 <a:solidFill>
-                  <a:srgbClr val="1750EB"/>
+                  <a:srgbClr val="C45E00"/>
                 </a:solidFill>
                 <a:latin typeface="JetBrains Mono"/>
                 <a:ea typeface="JetBrains Mono"/>
@@ -8792,7 +8792,7 @@
             <a:r>
               <a:rPr sz="1100">
                 <a:solidFill>
-                  <a:srgbClr val="1750EB"/>
+                  <a:srgbClr val="C45E00"/>
                 </a:solidFill>
                 <a:latin typeface="JetBrains Mono"/>
                 <a:ea typeface="JetBrains Mono"/>
@@ -8835,7 +8835,7 @@
             <a:r>
               <a:rPr sz="1100">
                 <a:solidFill>
-                  <a:srgbClr val="1750EB"/>
+                  <a:srgbClr val="C45E00"/>
                 </a:solidFill>
                 <a:latin typeface="JetBrains Mono"/>
                 <a:ea typeface="JetBrains Mono"/>
@@ -8900,7 +8900,7 @@
             <a:r>
               <a:rPr sz="1100">
                 <a:solidFill>
-                  <a:srgbClr val="1750EB"/>
+                  <a:srgbClr val="C45E00"/>
                 </a:solidFill>
                 <a:latin typeface="JetBrains Mono"/>
                 <a:ea typeface="JetBrains Mono"/>
@@ -8943,7 +8943,7 @@
             <a:r>
               <a:rPr sz="1100">
                 <a:solidFill>
-                  <a:srgbClr val="1750EB"/>
+                  <a:srgbClr val="C45E00"/>
                 </a:solidFill>
                 <a:latin typeface="JetBrains Mono"/>
                 <a:ea typeface="JetBrains Mono"/>
@@ -9062,7 +9062,7 @@
             <a:r>
               <a:rPr sz="1100">
                 <a:solidFill>
-                  <a:srgbClr val="1750EB"/>
+                  <a:srgbClr val="C45E00"/>
                 </a:solidFill>
                 <a:latin typeface="JetBrains Mono"/>
                 <a:ea typeface="JetBrains Mono"/>
@@ -9084,7 +9084,7 @@
             <a:r>
               <a:rPr sz="1100">
                 <a:solidFill>
-                  <a:srgbClr val="1750EB"/>
+                  <a:srgbClr val="C45E00"/>
                 </a:solidFill>
                 <a:latin typeface="JetBrains Mono"/>
                 <a:ea typeface="JetBrains Mono"/>
@@ -9415,7 +9415,7 @@
             <a:r>
               <a:rPr sz="2050" b="0">
                 <a:solidFill>
-                  <a:srgbClr val="1750EB"/>
+                  <a:srgbClr val="C45E00"/>
                 </a:solidFill>
                 <a:latin typeface="JetBrains Mono"/>
                 <a:ea typeface="JetBrains Mono"/>
@@ -9462,7 +9462,7 @@
             <a:r>
               <a:rPr sz="2050" b="0">
                 <a:solidFill>
-                  <a:srgbClr val="1750EB"/>
+                  <a:srgbClr val="C45E00"/>
                 </a:solidFill>
                 <a:latin typeface="JetBrains Mono"/>
                 <a:ea typeface="JetBrains Mono"/>
@@ -9802,7 +9802,7 @@
             <a:r>
               <a:rPr sz="1100">
                 <a:solidFill>
-                  <a:srgbClr val="1750EB"/>
+                  <a:srgbClr val="C45E00"/>
                 </a:solidFill>
                 <a:latin typeface="JetBrains Mono"/>
                 <a:ea typeface="JetBrains Mono"/>
@@ -9845,7 +9845,7 @@
             <a:r>
               <a:rPr sz="1100">
                 <a:solidFill>
-                  <a:srgbClr val="1750EB"/>
+                  <a:srgbClr val="C45E00"/>
                 </a:solidFill>
                 <a:latin typeface="JetBrains Mono"/>
                 <a:ea typeface="JetBrains Mono"/>
@@ -9867,7 +9867,7 @@
             <a:r>
               <a:rPr sz="1100">
                 <a:solidFill>
-                  <a:srgbClr val="1750EB"/>
+                  <a:srgbClr val="C45E00"/>
                 </a:solidFill>
                 <a:latin typeface="JetBrains Mono"/>
                 <a:ea typeface="JetBrains Mono"/>
@@ -9910,7 +9910,7 @@
             <a:r>
               <a:rPr sz="1100">
                 <a:solidFill>
-                  <a:srgbClr val="1750EB"/>
+                  <a:srgbClr val="C45E00"/>
                 </a:solidFill>
                 <a:latin typeface="JetBrains Mono"/>
                 <a:ea typeface="JetBrains Mono"/>
@@ -9975,7 +9975,7 @@
             <a:r>
               <a:rPr sz="1100">
                 <a:solidFill>
-                  <a:srgbClr val="1750EB"/>
+                  <a:srgbClr val="C45E00"/>
                 </a:solidFill>
                 <a:latin typeface="JetBrains Mono"/>
                 <a:ea typeface="JetBrains Mono"/>
@@ -10018,7 +10018,7 @@
             <a:r>
               <a:rPr sz="1100">
                 <a:solidFill>
-                  <a:srgbClr val="1750EB"/>
+                  <a:srgbClr val="C45E00"/>
                 </a:solidFill>
                 <a:latin typeface="JetBrains Mono"/>
                 <a:ea typeface="JetBrains Mono"/>
@@ -10137,7 +10137,7 @@
             <a:r>
               <a:rPr sz="1100">
                 <a:solidFill>
-                  <a:srgbClr val="1750EB"/>
+                  <a:srgbClr val="C45E00"/>
                 </a:solidFill>
                 <a:latin typeface="JetBrains Mono"/>
                 <a:ea typeface="JetBrains Mono"/>
@@ -10159,7 +10159,7 @@
             <a:r>
               <a:rPr sz="1100">
                 <a:solidFill>
-                  <a:srgbClr val="1750EB"/>
+                  <a:srgbClr val="C45E00"/>
                 </a:solidFill>
                 <a:latin typeface="JetBrains Mono"/>
                 <a:ea typeface="JetBrains Mono"/>
@@ -10625,7 +10625,7 @@
             <a:r>
               <a:rPr sz="2050" b="0">
                 <a:solidFill>
-                  <a:srgbClr val="1750EB"/>
+                  <a:srgbClr val="C45E00"/>
                 </a:solidFill>
                 <a:latin typeface="JetBrains Mono"/>
                 <a:ea typeface="JetBrains Mono"/>
@@ -10647,7 +10647,7 @@
             <a:r>
               <a:rPr sz="2050" b="0">
                 <a:solidFill>
-                  <a:srgbClr val="1750EB"/>
+                  <a:srgbClr val="C45E00"/>
                 </a:solidFill>
                 <a:latin typeface="JetBrains Mono"/>
                 <a:ea typeface="JetBrains Mono"/>
@@ -11006,7 +11006,7 @@
             <a:r>
               <a:rPr sz="1100">
                 <a:solidFill>
-                  <a:srgbClr val="1750EB"/>
+                  <a:srgbClr val="C45E00"/>
                 </a:solidFill>
                 <a:latin typeface="JetBrains Mono"/>
                 <a:ea typeface="JetBrains Mono"/>
@@ -11049,7 +11049,7 @@
             <a:r>
               <a:rPr sz="1100">
                 <a:solidFill>
-                  <a:srgbClr val="1750EB"/>
+                  <a:srgbClr val="C45E00"/>
                 </a:solidFill>
                 <a:latin typeface="JetBrains Mono"/>
                 <a:ea typeface="JetBrains Mono"/>
@@ -11071,7 +11071,7 @@
             <a:r>
               <a:rPr sz="1100">
                 <a:solidFill>
-                  <a:srgbClr val="1750EB"/>
+                  <a:srgbClr val="C45E00"/>
                 </a:solidFill>
                 <a:latin typeface="JetBrains Mono"/>
                 <a:ea typeface="JetBrains Mono"/>
@@ -11114,7 +11114,7 @@
             <a:r>
               <a:rPr sz="1100">
                 <a:solidFill>
-                  <a:srgbClr val="1750EB"/>
+                  <a:srgbClr val="C45E00"/>
                 </a:solidFill>
                 <a:latin typeface="JetBrains Mono"/>
                 <a:ea typeface="JetBrains Mono"/>
@@ -11179,7 +11179,7 @@
             <a:r>
               <a:rPr sz="1100">
                 <a:solidFill>
-                  <a:srgbClr val="1750EB"/>
+                  <a:srgbClr val="C45E00"/>
                 </a:solidFill>
                 <a:latin typeface="JetBrains Mono"/>
                 <a:ea typeface="JetBrains Mono"/>
@@ -11222,7 +11222,7 @@
             <a:r>
               <a:rPr sz="1100">
                 <a:solidFill>
-                  <a:srgbClr val="1750EB"/>
+                  <a:srgbClr val="C45E00"/>
                 </a:solidFill>
                 <a:latin typeface="JetBrains Mono"/>
                 <a:ea typeface="JetBrains Mono"/>
@@ -11341,7 +11341,7 @@
             <a:r>
               <a:rPr sz="1100">
                 <a:solidFill>
-                  <a:srgbClr val="1750EB"/>
+                  <a:srgbClr val="C45E00"/>
                 </a:solidFill>
                 <a:latin typeface="JetBrains Mono"/>
                 <a:ea typeface="JetBrains Mono"/>
@@ -11363,7 +11363,7 @@
             <a:r>
               <a:rPr sz="1100">
                 <a:solidFill>
-                  <a:srgbClr val="1750EB"/>
+                  <a:srgbClr val="C45E00"/>
                 </a:solidFill>
                 <a:latin typeface="JetBrains Mono"/>
                 <a:ea typeface="JetBrains Mono"/>
@@ -11701,7 +11701,7 @@
             <a:r>
               <a:rPr sz="1800">
                 <a:solidFill>
-                  <a:srgbClr val="1750EB"/>
+                  <a:srgbClr val="C45E00"/>
                 </a:solidFill>
                 <a:latin typeface="JetBrains Mono"/>
                 <a:ea typeface="JetBrains Mono"/>
@@ -11742,7 +11742,7 @@
             <a:r>
               <a:rPr sz="1800">
                 <a:solidFill>
-                  <a:srgbClr val="1750EB"/>
+                  <a:srgbClr val="C45E00"/>
                 </a:solidFill>
                 <a:latin typeface="JetBrains Mono"/>
                 <a:ea typeface="JetBrains Mono"/>
@@ -11764,7 +11764,7 @@
             <a:r>
               <a:rPr sz="1800">
                 <a:solidFill>
-                  <a:srgbClr val="1750EB"/>
+                  <a:srgbClr val="C45E00"/>
                 </a:solidFill>
                 <a:latin typeface="JetBrains Mono"/>
                 <a:ea typeface="JetBrains Mono"/>
@@ -11805,7 +11805,7 @@
             <a:r>
               <a:rPr sz="1800">
                 <a:solidFill>
-                  <a:srgbClr val="1750EB"/>
+                  <a:srgbClr val="C45E00"/>
                 </a:solidFill>
                 <a:latin typeface="JetBrains Mono"/>
                 <a:ea typeface="JetBrains Mono"/>
@@ -11868,7 +11868,7 @@
             <a:r>
               <a:rPr sz="1800">
                 <a:solidFill>
-                  <a:srgbClr val="1750EB"/>
+                  <a:srgbClr val="C45E00"/>
                 </a:solidFill>
                 <a:latin typeface="JetBrains Mono"/>
                 <a:ea typeface="JetBrains Mono"/>
@@ -11909,7 +11909,7 @@
             <a:r>
               <a:rPr sz="1800">
                 <a:solidFill>
-                  <a:srgbClr val="1750EB"/>
+                  <a:srgbClr val="C45E00"/>
                 </a:solidFill>
                 <a:latin typeface="JetBrains Mono"/>
                 <a:ea typeface="JetBrains Mono"/>

--- a/Mapped Curriculum Lessons/Grade 8/Lesson 35 - Functions with 2D Data/Functions with 2D Data - Slides.pptx
+++ b/Mapped Curriculum Lessons/Grade 8/Lesson 35 - Functions with 2D Data/Functions with 2D Data - Slides.pptx
@@ -2,28 +2,28 @@
 <file path=ppt/presentation.xml><?xml version="1.0" encoding="utf-8"?>
 <p:presentation xmlns:p="http://schemas.openxmlformats.org/presentationml/2006/main" embedTrueTypeFonts="1" saveSubsetFonts="0">
   <p:sldMasterIdLst>
-    <p:sldMasterId xmlns:r="http://schemas.openxmlformats.org/officeDocument/2006/relationships" id="2147483648" r:id="R42408f78a4684f02"/>
+    <p:sldMasterId xmlns:r="http://schemas.openxmlformats.org/officeDocument/2006/relationships" id="2147483648" r:id="Rfcc614e0c94e49c1"/>
   </p:sldMasterIdLst>
   <p:notesMasterIdLst>
-    <p:notesMasterId xmlns:r="http://schemas.openxmlformats.org/officeDocument/2006/relationships" r:id="R8fd0c42d01e54166"/>
+    <p:notesMasterId xmlns:r="http://schemas.openxmlformats.org/officeDocument/2006/relationships" r:id="R0ec1577787d14b7a"/>
   </p:notesMasterIdLst>
   <p:sldIdLst>
-    <p:sldId xmlns:r="http://schemas.openxmlformats.org/officeDocument/2006/relationships" id="256" r:id="R8f8315d66a574647"/>
-    <p:sldId xmlns:r="http://schemas.openxmlformats.org/officeDocument/2006/relationships" id="257" r:id="R488aa12ffd9b4124"/>
-    <p:sldId xmlns:r="http://schemas.openxmlformats.org/officeDocument/2006/relationships" id="258" r:id="R29c2960608904f6c"/>
-    <p:sldId xmlns:r="http://schemas.openxmlformats.org/officeDocument/2006/relationships" id="259" r:id="R2b2eeb6f4c2844b1"/>
-    <p:sldId xmlns:r="http://schemas.openxmlformats.org/officeDocument/2006/relationships" id="260" r:id="Rf0530f888e934dbd"/>
-    <p:sldId xmlns:r="http://schemas.openxmlformats.org/officeDocument/2006/relationships" id="261" r:id="Rd88ebc1878814f7a"/>
-    <p:sldId xmlns:r="http://schemas.openxmlformats.org/officeDocument/2006/relationships" id="262" r:id="Re26311cedd044554"/>
-    <p:sldId xmlns:r="http://schemas.openxmlformats.org/officeDocument/2006/relationships" id="263" r:id="R9de2d67f1f614ac1"/>
-    <p:sldId xmlns:r="http://schemas.openxmlformats.org/officeDocument/2006/relationships" id="264" r:id="R525ee2f3677844fe"/>
+    <p:sldId xmlns:r="http://schemas.openxmlformats.org/officeDocument/2006/relationships" id="256" r:id="R47397f6935774def"/>
+    <p:sldId xmlns:r="http://schemas.openxmlformats.org/officeDocument/2006/relationships" id="257" r:id="Rad1b15a88cdd4809"/>
+    <p:sldId xmlns:r="http://schemas.openxmlformats.org/officeDocument/2006/relationships" id="258" r:id="Re734104f57cf47a3"/>
+    <p:sldId xmlns:r="http://schemas.openxmlformats.org/officeDocument/2006/relationships" id="259" r:id="Rbc1ce8b4f30444f3"/>
+    <p:sldId xmlns:r="http://schemas.openxmlformats.org/officeDocument/2006/relationships" id="260" r:id="R83313fa38e424303"/>
+    <p:sldId xmlns:r="http://schemas.openxmlformats.org/officeDocument/2006/relationships" id="261" r:id="Rc031a64d02fe4af6"/>
+    <p:sldId xmlns:r="http://schemas.openxmlformats.org/officeDocument/2006/relationships" id="262" r:id="R301d91ba3be44e78"/>
+    <p:sldId xmlns:r="http://schemas.openxmlformats.org/officeDocument/2006/relationships" id="263" r:id="R4e9e52cba1cb4432"/>
+    <p:sldId xmlns:r="http://schemas.openxmlformats.org/officeDocument/2006/relationships" id="264" r:id="R68e31ace26084a43"/>
   </p:sldIdLst>
   <p:sldSz cx="12192000" cy="6858000"/>
   <p:notesSz cx="6858000" cy="9144000"/>
   <p:embeddedFontLst>
     <p:embeddedFont>
       <p:font typeface="JetBrains Mono"/>
-      <p:regular xmlns:r="http://schemas.openxmlformats.org/officeDocument/2006/relationships" r:id="Rd1ed92c673d64514"/>
+      <p:regular xmlns:r="http://schemas.openxmlformats.org/officeDocument/2006/relationships" r:id="R3b6c559ac0534552"/>
     </p:embeddedFont>
   </p:embeddedFontLst>
 </p:presentation>
@@ -1071,7 +1071,7 @@
           <p:nvPr/>
         </p:nvPicPr>
         <p:blipFill rotWithShape="1">
-          <a:blip xmlns:r="http://schemas.openxmlformats.org/officeDocument/2006/relationships" xmlns:a="http://schemas.openxmlformats.org/drawingml/2006/main" r:embed="Rc250a9fc147647f2"/>
+          <a:blip xmlns:r="http://schemas.openxmlformats.org/officeDocument/2006/relationships" xmlns:a="http://schemas.openxmlformats.org/drawingml/2006/main" r:embed="R1480fedb2da045da"/>
           <a:stretch xmlns:a="http://schemas.openxmlformats.org/drawingml/2006/main"/>
         </p:blipFill>
         <p:spPr>
@@ -1451,7 +1451,7 @@
           <p:nvPr/>
         </p:nvPicPr>
         <p:blipFill rotWithShape="1">
-          <a:blip xmlns:r="http://schemas.openxmlformats.org/officeDocument/2006/relationships" xmlns:a="http://schemas.openxmlformats.org/drawingml/2006/main" r:embed="R09b0468e6d54419e">
+          <a:blip xmlns:r="http://schemas.openxmlformats.org/officeDocument/2006/relationships" xmlns:a="http://schemas.openxmlformats.org/drawingml/2006/main" r:embed="R3a54df4e0a7748ac">
             <a:alphaModFix amt="28000"/>
           </a:blip>
           <a:stretch xmlns:a="http://schemas.openxmlformats.org/drawingml/2006/main"/>
@@ -1664,7 +1664,7 @@
           <p:nvPr/>
         </p:nvPicPr>
         <p:blipFill rotWithShape="1">
-          <a:blip xmlns:r="http://schemas.openxmlformats.org/officeDocument/2006/relationships" xmlns:a="http://schemas.openxmlformats.org/drawingml/2006/main" r:embed="R5f74e88cfb3f45ff">
+          <a:blip xmlns:r="http://schemas.openxmlformats.org/officeDocument/2006/relationships" xmlns:a="http://schemas.openxmlformats.org/drawingml/2006/main" r:embed="R9f907ce674e94ee9">
             <a:alphaModFix amt="28000"/>
           </a:blip>
           <a:stretch xmlns:a="http://schemas.openxmlformats.org/drawingml/2006/main"/>
@@ -1899,7 +1899,7 @@
           <p:nvPr/>
         </p:nvPicPr>
         <p:blipFill rotWithShape="1">
-          <a:blip xmlns:r="http://schemas.openxmlformats.org/officeDocument/2006/relationships" xmlns:a="http://schemas.openxmlformats.org/drawingml/2006/main" r:embed="R072558232f7e48a0">
+          <a:blip xmlns:r="http://schemas.openxmlformats.org/officeDocument/2006/relationships" xmlns:a="http://schemas.openxmlformats.org/drawingml/2006/main" r:embed="Rdf710b1571964aba">
             <a:alphaModFix amt="28000"/>
           </a:blip>
           <a:stretch xmlns:a="http://schemas.openxmlformats.org/drawingml/2006/main"/>
@@ -2176,7 +2176,7 @@
           <p:nvPr/>
         </p:nvPicPr>
         <p:blipFill rotWithShape="1">
-          <a:blip xmlns:r="http://schemas.openxmlformats.org/officeDocument/2006/relationships" xmlns:a="http://schemas.openxmlformats.org/drawingml/2006/main" r:embed="Rbbed3be90ca041ea">
+          <a:blip xmlns:r="http://schemas.openxmlformats.org/officeDocument/2006/relationships" xmlns:a="http://schemas.openxmlformats.org/drawingml/2006/main" r:embed="R1e652db67ea248ea">
             <a:alphaModFix amt="28000"/>
           </a:blip>
           <a:stretch xmlns:a="http://schemas.openxmlformats.org/drawingml/2006/main"/>
@@ -2451,7 +2451,7 @@
           <p:nvPr/>
         </p:nvPicPr>
         <p:blipFill rotWithShape="1">
-          <a:blip xmlns:r="http://schemas.openxmlformats.org/officeDocument/2006/relationships" xmlns:a="http://schemas.openxmlformats.org/drawingml/2006/main" r:embed="R5745a35b809e4e7c">
+          <a:blip xmlns:r="http://schemas.openxmlformats.org/officeDocument/2006/relationships" xmlns:a="http://schemas.openxmlformats.org/drawingml/2006/main" r:embed="R2502b295163a43d0">
             <a:alphaModFix amt="28000"/>
           </a:blip>
           <a:stretch xmlns:a="http://schemas.openxmlformats.org/drawingml/2006/main"/>
@@ -2875,7 +2875,7 @@
           <p:nvPr/>
         </p:nvPicPr>
         <p:blipFill rotWithShape="1">
-          <a:blip xmlns:r="http://schemas.openxmlformats.org/officeDocument/2006/relationships" xmlns:a="http://schemas.openxmlformats.org/drawingml/2006/main" r:embed="R495ff705e01f46e4">
+          <a:blip xmlns:r="http://schemas.openxmlformats.org/officeDocument/2006/relationships" xmlns:a="http://schemas.openxmlformats.org/drawingml/2006/main" r:embed="Rde1b261a37524e03">
             <a:alphaModFix amt="28000"/>
           </a:blip>
           <a:stretch xmlns:a="http://schemas.openxmlformats.org/drawingml/2006/main"/>
@@ -3016,7 +3016,7 @@
           <p:nvPr/>
         </p:nvPicPr>
         <p:blipFill rotWithShape="1">
-          <a:blip xmlns:r="http://schemas.openxmlformats.org/officeDocument/2006/relationships" xmlns:a="http://schemas.openxmlformats.org/drawingml/2006/main" r:embed="Raa3df1c065564321">
+          <a:blip xmlns:r="http://schemas.openxmlformats.org/officeDocument/2006/relationships" xmlns:a="http://schemas.openxmlformats.org/drawingml/2006/main" r:embed="R5f61152c557943f4">
             <a:alphaModFix amt="28000"/>
           </a:blip>
           <a:stretch xmlns:a="http://schemas.openxmlformats.org/drawingml/2006/main"/>
@@ -3130,7 +3130,7 @@
           <p:nvPr/>
         </p:nvPicPr>
         <p:blipFill rotWithShape="1">
-          <a:blip xmlns:r="http://schemas.openxmlformats.org/officeDocument/2006/relationships" xmlns:a="http://schemas.openxmlformats.org/drawingml/2006/main" r:embed="R47c4ecfb16fd47d7">
+          <a:blip xmlns:r="http://schemas.openxmlformats.org/officeDocument/2006/relationships" xmlns:a="http://schemas.openxmlformats.org/drawingml/2006/main" r:embed="R40ab0a0b158e4821">
             <a:alphaModFix amt="28000"/>
           </a:blip>
           <a:stretch xmlns:a="http://schemas.openxmlformats.org/drawingml/2006/main"/>
@@ -3457,7 +3457,7 @@
           <p:nvPr/>
         </p:nvPicPr>
         <p:blipFill rotWithShape="1">
-          <a:blip xmlns:r="http://schemas.openxmlformats.org/officeDocument/2006/relationships" xmlns:a="http://schemas.openxmlformats.org/drawingml/2006/main" r:embed="R6bed49eaafb44d37">
+          <a:blip xmlns:r="http://schemas.openxmlformats.org/officeDocument/2006/relationships" xmlns:a="http://schemas.openxmlformats.org/drawingml/2006/main" r:embed="Rf928ee3368694237">
             <a:alphaModFix amt="28000"/>
           </a:blip>
           <a:stretch xmlns:a="http://schemas.openxmlformats.org/drawingml/2006/main"/>
@@ -3745,7 +3745,7 @@
           <p:nvPr/>
         </p:nvPicPr>
         <p:blipFill rotWithShape="1">
-          <a:blip xmlns:r="http://schemas.openxmlformats.org/officeDocument/2006/relationships" xmlns:a="http://schemas.openxmlformats.org/drawingml/2006/main" r:embed="R73fe433d0f31473e">
+          <a:blip xmlns:r="http://schemas.openxmlformats.org/officeDocument/2006/relationships" xmlns:a="http://schemas.openxmlformats.org/drawingml/2006/main" r:embed="R4e63723102f84824">
             <a:alphaModFix amt="28000"/>
           </a:blip>
           <a:stretch xmlns:a="http://schemas.openxmlformats.org/drawingml/2006/main"/>
@@ -3982,17 +3982,17 @@
   </p:cSld>
   <p:clrMap bg1="lt1" tx1="dk1" bg2="lt2" tx2="dk2" accent1="accent1" accent2="accent2" accent3="accent3" accent4="accent4" accent5="accent5" accent6="accent6" hlink="hlink" folHlink="folHlink"/>
   <p:sldLayoutIdLst>
-    <p:sldLayoutId xmlns:r="http://schemas.openxmlformats.org/officeDocument/2006/relationships" id="2147483649" r:id="R65f8823cb3064763"/>
-    <p:sldLayoutId xmlns:r="http://schemas.openxmlformats.org/officeDocument/2006/relationships" id="2147483650" r:id="R21ce3075100442a9"/>
-    <p:sldLayoutId xmlns:r="http://schemas.openxmlformats.org/officeDocument/2006/relationships" id="2147483651" r:id="R207f7366fd204142"/>
-    <p:sldLayoutId xmlns:r="http://schemas.openxmlformats.org/officeDocument/2006/relationships" id="2147483652" r:id="R2ec6ad0d41b34b73"/>
-    <p:sldLayoutId xmlns:r="http://schemas.openxmlformats.org/officeDocument/2006/relationships" id="2147483653" r:id="Re20dbf18bf6642c8"/>
-    <p:sldLayoutId xmlns:r="http://schemas.openxmlformats.org/officeDocument/2006/relationships" id="2147483654" r:id="R032149f704204d7a"/>
-    <p:sldLayoutId xmlns:r="http://schemas.openxmlformats.org/officeDocument/2006/relationships" id="2147483655" r:id="R119687909aef4c6b"/>
-    <p:sldLayoutId xmlns:r="http://schemas.openxmlformats.org/officeDocument/2006/relationships" id="2147483656" r:id="Ra04bcab00eec4787"/>
-    <p:sldLayoutId xmlns:r="http://schemas.openxmlformats.org/officeDocument/2006/relationships" id="2147483657" r:id="R7abd61a583b74338"/>
-    <p:sldLayoutId xmlns:r="http://schemas.openxmlformats.org/officeDocument/2006/relationships" id="2147483658" r:id="R33b20e87000a4feb"/>
-    <p:sldLayoutId xmlns:r="http://schemas.openxmlformats.org/officeDocument/2006/relationships" id="2147483659" r:id="R1da3d3cbe5a44f49"/>
+    <p:sldLayoutId xmlns:r="http://schemas.openxmlformats.org/officeDocument/2006/relationships" id="2147483649" r:id="R4a76ec845f2c4f74"/>
+    <p:sldLayoutId xmlns:r="http://schemas.openxmlformats.org/officeDocument/2006/relationships" id="2147483650" r:id="R5bc1cae06e9c495f"/>
+    <p:sldLayoutId xmlns:r="http://schemas.openxmlformats.org/officeDocument/2006/relationships" id="2147483651" r:id="R33cff0f96b2d4d19"/>
+    <p:sldLayoutId xmlns:r="http://schemas.openxmlformats.org/officeDocument/2006/relationships" id="2147483652" r:id="Rda6a8ef925254dcd"/>
+    <p:sldLayoutId xmlns:r="http://schemas.openxmlformats.org/officeDocument/2006/relationships" id="2147483653" r:id="Rf3a591d25cf64d3b"/>
+    <p:sldLayoutId xmlns:r="http://schemas.openxmlformats.org/officeDocument/2006/relationships" id="2147483654" r:id="R2ee4311e993642f0"/>
+    <p:sldLayoutId xmlns:r="http://schemas.openxmlformats.org/officeDocument/2006/relationships" id="2147483655" r:id="Rbe2d3c056db44dbb"/>
+    <p:sldLayoutId xmlns:r="http://schemas.openxmlformats.org/officeDocument/2006/relationships" id="2147483656" r:id="Ra028287d880e4023"/>
+    <p:sldLayoutId xmlns:r="http://schemas.openxmlformats.org/officeDocument/2006/relationships" id="2147483657" r:id="Rb86d21d8303b47c0"/>
+    <p:sldLayoutId xmlns:r="http://schemas.openxmlformats.org/officeDocument/2006/relationships" id="2147483658" r:id="Rea9326a10f334b0b"/>
+    <p:sldLayoutId xmlns:r="http://schemas.openxmlformats.org/officeDocument/2006/relationships" id="2147483659" r:id="R9dda57e62fe14d4e"/>
   </p:sldLayoutIdLst>
   <p:hf hdr="0" ftr="0" dt="0"/>
   <p:txStyles>

--- a/Mapped Curriculum Lessons/Grade 8/Lesson 35 - Functions with 2D Data/Functions with 2D Data - Slides.pptx
+++ b/Mapped Curriculum Lessons/Grade 8/Lesson 35 - Functions with 2D Data/Functions with 2D Data - Slides.pptx
@@ -2,28 +2,28 @@
 <file path=ppt/presentation.xml><?xml version="1.0" encoding="utf-8"?>
 <p:presentation xmlns:p="http://schemas.openxmlformats.org/presentationml/2006/main" embedTrueTypeFonts="1" saveSubsetFonts="0">
   <p:sldMasterIdLst>
-    <p:sldMasterId xmlns:r="http://schemas.openxmlformats.org/officeDocument/2006/relationships" id="2147483648" r:id="Rfcc614e0c94e49c1"/>
+    <p:sldMasterId xmlns:r="http://schemas.openxmlformats.org/officeDocument/2006/relationships" id="2147483648" r:id="R7815d3436ea24415"/>
   </p:sldMasterIdLst>
   <p:notesMasterIdLst>
-    <p:notesMasterId xmlns:r="http://schemas.openxmlformats.org/officeDocument/2006/relationships" r:id="R0ec1577787d14b7a"/>
+    <p:notesMasterId xmlns:r="http://schemas.openxmlformats.org/officeDocument/2006/relationships" r:id="R991b012d902e4020"/>
   </p:notesMasterIdLst>
   <p:sldIdLst>
-    <p:sldId xmlns:r="http://schemas.openxmlformats.org/officeDocument/2006/relationships" id="256" r:id="R47397f6935774def"/>
-    <p:sldId xmlns:r="http://schemas.openxmlformats.org/officeDocument/2006/relationships" id="257" r:id="Rad1b15a88cdd4809"/>
-    <p:sldId xmlns:r="http://schemas.openxmlformats.org/officeDocument/2006/relationships" id="258" r:id="Re734104f57cf47a3"/>
-    <p:sldId xmlns:r="http://schemas.openxmlformats.org/officeDocument/2006/relationships" id="259" r:id="Rbc1ce8b4f30444f3"/>
-    <p:sldId xmlns:r="http://schemas.openxmlformats.org/officeDocument/2006/relationships" id="260" r:id="R83313fa38e424303"/>
-    <p:sldId xmlns:r="http://schemas.openxmlformats.org/officeDocument/2006/relationships" id="261" r:id="Rc031a64d02fe4af6"/>
-    <p:sldId xmlns:r="http://schemas.openxmlformats.org/officeDocument/2006/relationships" id="262" r:id="R301d91ba3be44e78"/>
-    <p:sldId xmlns:r="http://schemas.openxmlformats.org/officeDocument/2006/relationships" id="263" r:id="R4e9e52cba1cb4432"/>
-    <p:sldId xmlns:r="http://schemas.openxmlformats.org/officeDocument/2006/relationships" id="264" r:id="R68e31ace26084a43"/>
+    <p:sldId xmlns:r="http://schemas.openxmlformats.org/officeDocument/2006/relationships" id="256" r:id="Reb86327de2214919"/>
+    <p:sldId xmlns:r="http://schemas.openxmlformats.org/officeDocument/2006/relationships" id="257" r:id="R9f59b06990b4433c"/>
+    <p:sldId xmlns:r="http://schemas.openxmlformats.org/officeDocument/2006/relationships" id="258" r:id="R3660900d2095409f"/>
+    <p:sldId xmlns:r="http://schemas.openxmlformats.org/officeDocument/2006/relationships" id="259" r:id="Ra102604a69d442e5"/>
+    <p:sldId xmlns:r="http://schemas.openxmlformats.org/officeDocument/2006/relationships" id="260" r:id="R56480f063eec4614"/>
+    <p:sldId xmlns:r="http://schemas.openxmlformats.org/officeDocument/2006/relationships" id="261" r:id="Re5a642c47b274c14"/>
+    <p:sldId xmlns:r="http://schemas.openxmlformats.org/officeDocument/2006/relationships" id="262" r:id="Rc3c94284b3f54365"/>
+    <p:sldId xmlns:r="http://schemas.openxmlformats.org/officeDocument/2006/relationships" id="263" r:id="R12458fbf0d2f4915"/>
+    <p:sldId xmlns:r="http://schemas.openxmlformats.org/officeDocument/2006/relationships" id="264" r:id="Rb1f5a41233474bd2"/>
   </p:sldIdLst>
   <p:sldSz cx="12192000" cy="6858000"/>
   <p:notesSz cx="6858000" cy="9144000"/>
   <p:embeddedFontLst>
     <p:embeddedFont>
       <p:font typeface="JetBrains Mono"/>
-      <p:regular xmlns:r="http://schemas.openxmlformats.org/officeDocument/2006/relationships" r:id="R3b6c559ac0534552"/>
+      <p:regular xmlns:r="http://schemas.openxmlformats.org/officeDocument/2006/relationships" r:id="Rae69c63a95344a2d"/>
     </p:embeddedFont>
   </p:embeddedFontLst>
 </p:presentation>
@@ -1071,7 +1071,7 @@
           <p:nvPr/>
         </p:nvPicPr>
         <p:blipFill rotWithShape="1">
-          <a:blip xmlns:r="http://schemas.openxmlformats.org/officeDocument/2006/relationships" xmlns:a="http://schemas.openxmlformats.org/drawingml/2006/main" r:embed="R1480fedb2da045da"/>
+          <a:blip xmlns:r="http://schemas.openxmlformats.org/officeDocument/2006/relationships" xmlns:a="http://schemas.openxmlformats.org/drawingml/2006/main" r:embed="Re97fa16b51bd423e"/>
           <a:stretch xmlns:a="http://schemas.openxmlformats.org/drawingml/2006/main"/>
         </p:blipFill>
         <p:spPr>
@@ -1451,7 +1451,7 @@
           <p:nvPr/>
         </p:nvPicPr>
         <p:blipFill rotWithShape="1">
-          <a:blip xmlns:r="http://schemas.openxmlformats.org/officeDocument/2006/relationships" xmlns:a="http://schemas.openxmlformats.org/drawingml/2006/main" r:embed="R3a54df4e0a7748ac">
+          <a:blip xmlns:r="http://schemas.openxmlformats.org/officeDocument/2006/relationships" xmlns:a="http://schemas.openxmlformats.org/drawingml/2006/main" r:embed="Raad2e9e9524b4fb8">
             <a:alphaModFix amt="28000"/>
           </a:blip>
           <a:stretch xmlns:a="http://schemas.openxmlformats.org/drawingml/2006/main"/>
@@ -1664,7 +1664,7 @@
           <p:nvPr/>
         </p:nvPicPr>
         <p:blipFill rotWithShape="1">
-          <a:blip xmlns:r="http://schemas.openxmlformats.org/officeDocument/2006/relationships" xmlns:a="http://schemas.openxmlformats.org/drawingml/2006/main" r:embed="R9f907ce674e94ee9">
+          <a:blip xmlns:r="http://schemas.openxmlformats.org/officeDocument/2006/relationships" xmlns:a="http://schemas.openxmlformats.org/drawingml/2006/main" r:embed="R003d7a3fdc854edc">
             <a:alphaModFix amt="28000"/>
           </a:blip>
           <a:stretch xmlns:a="http://schemas.openxmlformats.org/drawingml/2006/main"/>
@@ -1899,7 +1899,7 @@
           <p:nvPr/>
         </p:nvPicPr>
         <p:blipFill rotWithShape="1">
-          <a:blip xmlns:r="http://schemas.openxmlformats.org/officeDocument/2006/relationships" xmlns:a="http://schemas.openxmlformats.org/drawingml/2006/main" r:embed="Rdf710b1571964aba">
+          <a:blip xmlns:r="http://schemas.openxmlformats.org/officeDocument/2006/relationships" xmlns:a="http://schemas.openxmlformats.org/drawingml/2006/main" r:embed="Rd1463494d8f34af4">
             <a:alphaModFix amt="28000"/>
           </a:blip>
           <a:stretch xmlns:a="http://schemas.openxmlformats.org/drawingml/2006/main"/>
@@ -2176,7 +2176,7 @@
           <p:nvPr/>
         </p:nvPicPr>
         <p:blipFill rotWithShape="1">
-          <a:blip xmlns:r="http://schemas.openxmlformats.org/officeDocument/2006/relationships" xmlns:a="http://schemas.openxmlformats.org/drawingml/2006/main" r:embed="R1e652db67ea248ea">
+          <a:blip xmlns:r="http://schemas.openxmlformats.org/officeDocument/2006/relationships" xmlns:a="http://schemas.openxmlformats.org/drawingml/2006/main" r:embed="R32842cd6a1204e7f">
             <a:alphaModFix amt="28000"/>
           </a:blip>
           <a:stretch xmlns:a="http://schemas.openxmlformats.org/drawingml/2006/main"/>
@@ -2451,7 +2451,7 @@
           <p:nvPr/>
         </p:nvPicPr>
         <p:blipFill rotWithShape="1">
-          <a:blip xmlns:r="http://schemas.openxmlformats.org/officeDocument/2006/relationships" xmlns:a="http://schemas.openxmlformats.org/drawingml/2006/main" r:embed="R2502b295163a43d0">
+          <a:blip xmlns:r="http://schemas.openxmlformats.org/officeDocument/2006/relationships" xmlns:a="http://schemas.openxmlformats.org/drawingml/2006/main" r:embed="Rbb97dc7b49f94c03">
             <a:alphaModFix amt="28000"/>
           </a:blip>
           <a:stretch xmlns:a="http://schemas.openxmlformats.org/drawingml/2006/main"/>
@@ -2875,7 +2875,7 @@
           <p:nvPr/>
         </p:nvPicPr>
         <p:blipFill rotWithShape="1">
-          <a:blip xmlns:r="http://schemas.openxmlformats.org/officeDocument/2006/relationships" xmlns:a="http://schemas.openxmlformats.org/drawingml/2006/main" r:embed="Rde1b261a37524e03">
+          <a:blip xmlns:r="http://schemas.openxmlformats.org/officeDocument/2006/relationships" xmlns:a="http://schemas.openxmlformats.org/drawingml/2006/main" r:embed="R85f029c2249940b9">
             <a:alphaModFix amt="28000"/>
           </a:blip>
           <a:stretch xmlns:a="http://schemas.openxmlformats.org/drawingml/2006/main"/>
@@ -3016,7 +3016,7 @@
           <p:nvPr/>
         </p:nvPicPr>
         <p:blipFill rotWithShape="1">
-          <a:blip xmlns:r="http://schemas.openxmlformats.org/officeDocument/2006/relationships" xmlns:a="http://schemas.openxmlformats.org/drawingml/2006/main" r:embed="R5f61152c557943f4">
+          <a:blip xmlns:r="http://schemas.openxmlformats.org/officeDocument/2006/relationships" xmlns:a="http://schemas.openxmlformats.org/drawingml/2006/main" r:embed="Rbd0f65d085c34475">
             <a:alphaModFix amt="28000"/>
           </a:blip>
           <a:stretch xmlns:a="http://schemas.openxmlformats.org/drawingml/2006/main"/>
@@ -3130,7 +3130,7 @@
           <p:nvPr/>
         </p:nvPicPr>
         <p:blipFill rotWithShape="1">
-          <a:blip xmlns:r="http://schemas.openxmlformats.org/officeDocument/2006/relationships" xmlns:a="http://schemas.openxmlformats.org/drawingml/2006/main" r:embed="R40ab0a0b158e4821">
+          <a:blip xmlns:r="http://schemas.openxmlformats.org/officeDocument/2006/relationships" xmlns:a="http://schemas.openxmlformats.org/drawingml/2006/main" r:embed="R214a31ee89734d93">
             <a:alphaModFix amt="28000"/>
           </a:blip>
           <a:stretch xmlns:a="http://schemas.openxmlformats.org/drawingml/2006/main"/>
@@ -3457,7 +3457,7 @@
           <p:nvPr/>
         </p:nvPicPr>
         <p:blipFill rotWithShape="1">
-          <a:blip xmlns:r="http://schemas.openxmlformats.org/officeDocument/2006/relationships" xmlns:a="http://schemas.openxmlformats.org/drawingml/2006/main" r:embed="Rf928ee3368694237">
+          <a:blip xmlns:r="http://schemas.openxmlformats.org/officeDocument/2006/relationships" xmlns:a="http://schemas.openxmlformats.org/drawingml/2006/main" r:embed="Ra92df0e845c04c8a">
             <a:alphaModFix amt="28000"/>
           </a:blip>
           <a:stretch xmlns:a="http://schemas.openxmlformats.org/drawingml/2006/main"/>
@@ -3745,7 +3745,7 @@
           <p:nvPr/>
         </p:nvPicPr>
         <p:blipFill rotWithShape="1">
-          <a:blip xmlns:r="http://schemas.openxmlformats.org/officeDocument/2006/relationships" xmlns:a="http://schemas.openxmlformats.org/drawingml/2006/main" r:embed="R4e63723102f84824">
+          <a:blip xmlns:r="http://schemas.openxmlformats.org/officeDocument/2006/relationships" xmlns:a="http://schemas.openxmlformats.org/drawingml/2006/main" r:embed="R32e6ff86e14742df">
             <a:alphaModFix amt="28000"/>
           </a:blip>
           <a:stretch xmlns:a="http://schemas.openxmlformats.org/drawingml/2006/main"/>
@@ -3982,17 +3982,17 @@
   </p:cSld>
   <p:clrMap bg1="lt1" tx1="dk1" bg2="lt2" tx2="dk2" accent1="accent1" accent2="accent2" accent3="accent3" accent4="accent4" accent5="accent5" accent6="accent6" hlink="hlink" folHlink="folHlink"/>
   <p:sldLayoutIdLst>
-    <p:sldLayoutId xmlns:r="http://schemas.openxmlformats.org/officeDocument/2006/relationships" id="2147483649" r:id="R4a76ec845f2c4f74"/>
-    <p:sldLayoutId xmlns:r="http://schemas.openxmlformats.org/officeDocument/2006/relationships" id="2147483650" r:id="R5bc1cae06e9c495f"/>
-    <p:sldLayoutId xmlns:r="http://schemas.openxmlformats.org/officeDocument/2006/relationships" id="2147483651" r:id="R33cff0f96b2d4d19"/>
-    <p:sldLayoutId xmlns:r="http://schemas.openxmlformats.org/officeDocument/2006/relationships" id="2147483652" r:id="Rda6a8ef925254dcd"/>
-    <p:sldLayoutId xmlns:r="http://schemas.openxmlformats.org/officeDocument/2006/relationships" id="2147483653" r:id="Rf3a591d25cf64d3b"/>
-    <p:sldLayoutId xmlns:r="http://schemas.openxmlformats.org/officeDocument/2006/relationships" id="2147483654" r:id="R2ee4311e993642f0"/>
-    <p:sldLayoutId xmlns:r="http://schemas.openxmlformats.org/officeDocument/2006/relationships" id="2147483655" r:id="Rbe2d3c056db44dbb"/>
-    <p:sldLayoutId xmlns:r="http://schemas.openxmlformats.org/officeDocument/2006/relationships" id="2147483656" r:id="Ra028287d880e4023"/>
-    <p:sldLayoutId xmlns:r="http://schemas.openxmlformats.org/officeDocument/2006/relationships" id="2147483657" r:id="Rb86d21d8303b47c0"/>
-    <p:sldLayoutId xmlns:r="http://schemas.openxmlformats.org/officeDocument/2006/relationships" id="2147483658" r:id="Rea9326a10f334b0b"/>
-    <p:sldLayoutId xmlns:r="http://schemas.openxmlformats.org/officeDocument/2006/relationships" id="2147483659" r:id="R9dda57e62fe14d4e"/>
+    <p:sldLayoutId xmlns:r="http://schemas.openxmlformats.org/officeDocument/2006/relationships" id="2147483649" r:id="Rb653f38ab8fc4dbd"/>
+    <p:sldLayoutId xmlns:r="http://schemas.openxmlformats.org/officeDocument/2006/relationships" id="2147483650" r:id="Rb04ba9f82f5f4deb"/>
+    <p:sldLayoutId xmlns:r="http://schemas.openxmlformats.org/officeDocument/2006/relationships" id="2147483651" r:id="R2cc8884265044b52"/>
+    <p:sldLayoutId xmlns:r="http://schemas.openxmlformats.org/officeDocument/2006/relationships" id="2147483652" r:id="R82a4b9438ec44ccb"/>
+    <p:sldLayoutId xmlns:r="http://schemas.openxmlformats.org/officeDocument/2006/relationships" id="2147483653" r:id="Rbf71d671c5c44b3c"/>
+    <p:sldLayoutId xmlns:r="http://schemas.openxmlformats.org/officeDocument/2006/relationships" id="2147483654" r:id="R76ab96c8867b4064"/>
+    <p:sldLayoutId xmlns:r="http://schemas.openxmlformats.org/officeDocument/2006/relationships" id="2147483655" r:id="R7acdf3d3ca954421"/>
+    <p:sldLayoutId xmlns:r="http://schemas.openxmlformats.org/officeDocument/2006/relationships" id="2147483656" r:id="R71b9216ffedf4de4"/>
+    <p:sldLayoutId xmlns:r="http://schemas.openxmlformats.org/officeDocument/2006/relationships" id="2147483657" r:id="R7cfde46031784816"/>
+    <p:sldLayoutId xmlns:r="http://schemas.openxmlformats.org/officeDocument/2006/relationships" id="2147483658" r:id="R53d429ac71dd445e"/>
+    <p:sldLayoutId xmlns:r="http://schemas.openxmlformats.org/officeDocument/2006/relationships" id="2147483659" r:id="Rc4082c93185d44be"/>
   </p:sldLayoutIdLst>
   <p:hf hdr="0" ftr="0" dt="0"/>
   <p:txStyles>
@@ -4928,24 +4928,13 @@
             <a:r>
               <a:rPr sz="2400">
                 <a:solidFill>
-                  <a:srgbClr val="080808"/>
-                </a:solidFill>
-                <a:latin typeface="JetBrains Mono"/>
-                <a:ea typeface="JetBrains Mono"/>
-                <a:cs typeface="JetBrains Mono"/>
-              </a:rPr>
-              <a:t>    </a:t>
-            </a:r>
-            <a:r>
-              <a:rPr sz="2400">
-                <a:solidFill>
                   <a:srgbClr val="C45E00"/>
                 </a:solidFill>
                 <a:latin typeface="JetBrains Mono"/>
                 <a:ea typeface="JetBrains Mono"/>
                 <a:cs typeface="JetBrains Mono"/>
               </a:rPr>
-              <a:t>for</a:t>
+              <a:t>    for</a:t>
             </a:r>
             <a:r>
               <a:rPr sz="2400">
@@ -4991,24 +4980,13 @@
             <a:r>
               <a:rPr sz="2400">
                 <a:solidFill>
-                  <a:srgbClr val="080808"/>
-                </a:solidFill>
-                <a:latin typeface="JetBrains Mono"/>
-                <a:ea typeface="JetBrains Mono"/>
-                <a:cs typeface="JetBrains Mono"/>
-              </a:rPr>
-              <a:t>        </a:t>
-            </a:r>
-            <a:r>
-              <a:rPr sz="2400">
-                <a:solidFill>
                   <a:srgbClr val="C45E00"/>
                 </a:solidFill>
                 <a:latin typeface="JetBrains Mono"/>
                 <a:ea typeface="JetBrains Mono"/>
                 <a:cs typeface="JetBrains Mono"/>
               </a:rPr>
-              <a:t>if</a:t>
+              <a:t>        if</a:t>
             </a:r>
             <a:r>
               <a:rPr sz="2400">
@@ -5054,24 +5032,13 @@
             <a:r>
               <a:rPr sz="2400">
                 <a:solidFill>
-                  <a:srgbClr val="080808"/>
-                </a:solidFill>
-                <a:latin typeface="JetBrains Mono"/>
-                <a:ea typeface="JetBrains Mono"/>
-                <a:cs typeface="JetBrains Mono"/>
-              </a:rPr>
-              <a:t>            </a:t>
-            </a:r>
-            <a:r>
-              <a:rPr sz="2400">
-                <a:solidFill>
                   <a:srgbClr val="C45E00"/>
                 </a:solidFill>
                 <a:latin typeface="JetBrains Mono"/>
                 <a:ea typeface="JetBrains Mono"/>
                 <a:cs typeface="JetBrains Mono"/>
               </a:rPr>
-              <a:t>return</a:t>
+              <a:t>            return</a:t>
             </a:r>
             <a:r>
               <a:rPr sz="2400">
@@ -5095,24 +5062,13 @@
             <a:r>
               <a:rPr sz="2400">
                 <a:solidFill>
-                  <a:srgbClr val="080808"/>
-                </a:solidFill>
-                <a:latin typeface="JetBrains Mono"/>
-                <a:ea typeface="JetBrains Mono"/>
-                <a:cs typeface="JetBrains Mono"/>
-              </a:rPr>
-              <a:t>    </a:t>
-            </a:r>
-            <a:r>
-              <a:rPr sz="2400">
-                <a:solidFill>
                   <a:srgbClr val="C45E00"/>
                 </a:solidFill>
                 <a:latin typeface="JetBrains Mono"/>
                 <a:ea typeface="JetBrains Mono"/>
                 <a:cs typeface="JetBrains Mono"/>
               </a:rPr>
-              <a:t>return</a:t>
+              <a:t>    return</a:t>
             </a:r>
             <a:r>
               <a:rPr sz="2400">
@@ -5273,24 +5229,13 @@
             <a:r>
               <a:rPr sz="2400">
                 <a:solidFill>
-                  <a:srgbClr val="080808"/>
-                </a:solidFill>
-                <a:latin typeface="JetBrains Mono"/>
-                <a:ea typeface="JetBrains Mono"/>
-                <a:cs typeface="JetBrains Mono"/>
-              </a:rPr>
-              <a:t>    </a:t>
-            </a:r>
-            <a:r>
-              <a:rPr sz="2400">
-                <a:solidFill>
                   <a:srgbClr val="1750EB"/>
                 </a:solidFill>
                 <a:latin typeface="JetBrains Mono"/>
                 <a:ea typeface="JetBrains Mono"/>
                 <a:cs typeface="JetBrains Mono"/>
               </a:rPr>
-              <a:t>print</a:t>
+              <a:t>    print</a:t>
             </a:r>
             <a:r>
               <a:rPr sz="2400">
@@ -5755,24 +5700,13 @@
             <a:r>
               <a:rPr sz="2400">
                 <a:solidFill>
-                  <a:srgbClr val="080808"/>
-                </a:solidFill>
-                <a:latin typeface="JetBrains Mono"/>
-                <a:ea typeface="JetBrains Mono"/>
-                <a:cs typeface="JetBrains Mono"/>
-              </a:rPr>
-              <a:t>    </a:t>
-            </a:r>
-            <a:r>
-              <a:rPr sz="2400">
-                <a:solidFill>
                   <a:srgbClr val="C45E00"/>
                 </a:solidFill>
                 <a:latin typeface="JetBrains Mono"/>
                 <a:ea typeface="JetBrains Mono"/>
                 <a:cs typeface="JetBrains Mono"/>
               </a:rPr>
-              <a:t>for</a:t>
+              <a:t>    for</a:t>
             </a:r>
             <a:r>
               <a:rPr sz="2400">
@@ -5818,24 +5752,13 @@
             <a:r>
               <a:rPr sz="2400">
                 <a:solidFill>
-                  <a:srgbClr val="080808"/>
-                </a:solidFill>
-                <a:latin typeface="JetBrains Mono"/>
-                <a:ea typeface="JetBrains Mono"/>
-                <a:cs typeface="JetBrains Mono"/>
-              </a:rPr>
-              <a:t>        </a:t>
-            </a:r>
-            <a:r>
-              <a:rPr sz="2400">
-                <a:solidFill>
                   <a:srgbClr val="C45E00"/>
                 </a:solidFill>
                 <a:latin typeface="JetBrains Mono"/>
                 <a:ea typeface="JetBrains Mono"/>
                 <a:cs typeface="JetBrains Mono"/>
               </a:rPr>
-              <a:t>if</a:t>
+              <a:t>        if</a:t>
             </a:r>
             <a:r>
               <a:rPr sz="2400">
@@ -5881,24 +5804,13 @@
             <a:r>
               <a:rPr sz="2400">
                 <a:solidFill>
-                  <a:srgbClr val="080808"/>
-                </a:solidFill>
-                <a:latin typeface="JetBrains Mono"/>
-                <a:ea typeface="JetBrains Mono"/>
-                <a:cs typeface="JetBrains Mono"/>
-              </a:rPr>
-              <a:t>            </a:t>
-            </a:r>
-            <a:r>
-              <a:rPr sz="2400">
-                <a:solidFill>
                   <a:srgbClr val="C45E00"/>
                 </a:solidFill>
                 <a:latin typeface="JetBrains Mono"/>
                 <a:ea typeface="JetBrains Mono"/>
                 <a:cs typeface="JetBrains Mono"/>
               </a:rPr>
-              <a:t>return</a:t>
+              <a:t>            return</a:t>
             </a:r>
             <a:r>
               <a:rPr sz="2400">
@@ -5922,24 +5834,13 @@
             <a:r>
               <a:rPr sz="2400">
                 <a:solidFill>
-                  <a:srgbClr val="080808"/>
-                </a:solidFill>
-                <a:latin typeface="JetBrains Mono"/>
-                <a:ea typeface="JetBrains Mono"/>
-                <a:cs typeface="JetBrains Mono"/>
-              </a:rPr>
-              <a:t>    </a:t>
-            </a:r>
-            <a:r>
-              <a:rPr sz="2400">
-                <a:solidFill>
                   <a:srgbClr val="C45E00"/>
                 </a:solidFill>
                 <a:latin typeface="JetBrains Mono"/>
                 <a:ea typeface="JetBrains Mono"/>
                 <a:cs typeface="JetBrains Mono"/>
               </a:rPr>
-              <a:t>return</a:t>
+              <a:t>    return</a:t>
             </a:r>
             <a:r>
               <a:rPr sz="2400">
@@ -6100,24 +6001,13 @@
             <a:r>
               <a:rPr sz="2400">
                 <a:solidFill>
-                  <a:srgbClr val="080808"/>
-                </a:solidFill>
-                <a:latin typeface="JetBrains Mono"/>
-                <a:ea typeface="JetBrains Mono"/>
-                <a:cs typeface="JetBrains Mono"/>
-              </a:rPr>
-              <a:t>    </a:t>
-            </a:r>
-            <a:r>
-              <a:rPr sz="2400">
-                <a:solidFill>
                   <a:srgbClr val="1750EB"/>
                 </a:solidFill>
                 <a:latin typeface="JetBrains Mono"/>
                 <a:ea typeface="JetBrains Mono"/>
                 <a:cs typeface="JetBrains Mono"/>
               </a:rPr>
-              <a:t>print</a:t>
+              <a:t>    print</a:t>
             </a:r>
             <a:r>
               <a:rPr sz="2400">
@@ -6582,24 +6472,13 @@
             <a:r>
               <a:rPr sz="2400">
                 <a:solidFill>
-                  <a:srgbClr val="080808"/>
-                </a:solidFill>
-                <a:latin typeface="JetBrains Mono"/>
-                <a:ea typeface="JetBrains Mono"/>
-                <a:cs typeface="JetBrains Mono"/>
-              </a:rPr>
-              <a:t>    </a:t>
-            </a:r>
-            <a:r>
-              <a:rPr sz="2400">
-                <a:solidFill>
                   <a:srgbClr val="C45E00"/>
                 </a:solidFill>
                 <a:latin typeface="JetBrains Mono"/>
                 <a:ea typeface="JetBrains Mono"/>
                 <a:cs typeface="JetBrains Mono"/>
               </a:rPr>
-              <a:t>for</a:t>
+              <a:t>    for</a:t>
             </a:r>
             <a:r>
               <a:rPr sz="2400">
@@ -6645,24 +6524,13 @@
             <a:r>
               <a:rPr sz="2400">
                 <a:solidFill>
-                  <a:srgbClr val="080808"/>
-                </a:solidFill>
-                <a:latin typeface="JetBrains Mono"/>
-                <a:ea typeface="JetBrains Mono"/>
-                <a:cs typeface="JetBrains Mono"/>
-              </a:rPr>
-              <a:t>        </a:t>
-            </a:r>
-            <a:r>
-              <a:rPr sz="2400">
-                <a:solidFill>
                   <a:srgbClr val="C45E00"/>
                 </a:solidFill>
                 <a:latin typeface="JetBrains Mono"/>
                 <a:ea typeface="JetBrains Mono"/>
                 <a:cs typeface="JetBrains Mono"/>
               </a:rPr>
-              <a:t>if</a:t>
+              <a:t>        if</a:t>
             </a:r>
             <a:r>
               <a:rPr sz="2400">
@@ -6708,24 +6576,13 @@
             <a:r>
               <a:rPr sz="2400">
                 <a:solidFill>
-                  <a:srgbClr val="080808"/>
-                </a:solidFill>
-                <a:latin typeface="JetBrains Mono"/>
-                <a:ea typeface="JetBrains Mono"/>
-                <a:cs typeface="JetBrains Mono"/>
-              </a:rPr>
-              <a:t>            </a:t>
-            </a:r>
-            <a:r>
-              <a:rPr sz="2400">
-                <a:solidFill>
                   <a:srgbClr val="C45E00"/>
                 </a:solidFill>
                 <a:latin typeface="JetBrains Mono"/>
                 <a:ea typeface="JetBrains Mono"/>
                 <a:cs typeface="JetBrains Mono"/>
               </a:rPr>
-              <a:t>return</a:t>
+              <a:t>            return</a:t>
             </a:r>
             <a:r>
               <a:rPr sz="2400">
@@ -6749,24 +6606,13 @@
             <a:r>
               <a:rPr sz="2400">
                 <a:solidFill>
-                  <a:srgbClr val="080808"/>
-                </a:solidFill>
-                <a:latin typeface="JetBrains Mono"/>
-                <a:ea typeface="JetBrains Mono"/>
-                <a:cs typeface="JetBrains Mono"/>
-              </a:rPr>
-              <a:t>    </a:t>
-            </a:r>
-            <a:r>
-              <a:rPr sz="2400">
-                <a:solidFill>
                   <a:srgbClr val="C45E00"/>
                 </a:solidFill>
                 <a:latin typeface="JetBrains Mono"/>
                 <a:ea typeface="JetBrains Mono"/>
                 <a:cs typeface="JetBrains Mono"/>
               </a:rPr>
-              <a:t>return</a:t>
+              <a:t>    return</a:t>
             </a:r>
             <a:r>
               <a:rPr sz="2400">
@@ -6927,24 +6773,13 @@
             <a:r>
               <a:rPr sz="2400">
                 <a:solidFill>
-                  <a:srgbClr val="080808"/>
-                </a:solidFill>
-                <a:latin typeface="JetBrains Mono"/>
-                <a:ea typeface="JetBrains Mono"/>
-                <a:cs typeface="JetBrains Mono"/>
-              </a:rPr>
-              <a:t>    </a:t>
-            </a:r>
-            <a:r>
-              <a:rPr sz="2400">
-                <a:solidFill>
                   <a:srgbClr val="1750EB"/>
                 </a:solidFill>
                 <a:latin typeface="JetBrains Mono"/>
                 <a:ea typeface="JetBrains Mono"/>
                 <a:cs typeface="JetBrains Mono"/>
               </a:rPr>
-              <a:t>print</a:t>
+              <a:t>    print</a:t>
             </a:r>
             <a:r>
               <a:rPr sz="2400">
@@ -7662,24 +7497,13 @@
             <a:r>
               <a:rPr sz="1100">
                 <a:solidFill>
-                  <a:srgbClr val="080808"/>
-                </a:solidFill>
-                <a:latin typeface="JetBrains Mono"/>
-                <a:ea typeface="JetBrains Mono"/>
-                <a:cs typeface="JetBrains Mono"/>
-              </a:rPr>
-              <a:t>    </a:t>
-            </a:r>
-            <a:r>
-              <a:rPr sz="1100">
-                <a:solidFill>
                   <a:srgbClr val="C45E00"/>
                 </a:solidFill>
                 <a:latin typeface="JetBrains Mono"/>
                 <a:ea typeface="JetBrains Mono"/>
                 <a:cs typeface="JetBrains Mono"/>
               </a:rPr>
-              <a:t>for</a:t>
+              <a:t>    for</a:t>
             </a:r>
             <a:r>
               <a:rPr sz="1100">
@@ -7727,24 +7551,13 @@
             <a:r>
               <a:rPr sz="1100">
                 <a:solidFill>
-                  <a:srgbClr val="080808"/>
-                </a:solidFill>
-                <a:latin typeface="JetBrains Mono"/>
-                <a:ea typeface="JetBrains Mono"/>
-                <a:cs typeface="JetBrains Mono"/>
-              </a:rPr>
-              <a:t>        </a:t>
-            </a:r>
-            <a:r>
-              <a:rPr sz="1100">
-                <a:solidFill>
                   <a:srgbClr val="C45E00"/>
                 </a:solidFill>
                 <a:latin typeface="JetBrains Mono"/>
                 <a:ea typeface="JetBrains Mono"/>
                 <a:cs typeface="JetBrains Mono"/>
               </a:rPr>
-              <a:t>if</a:t>
+              <a:t>        if</a:t>
             </a:r>
             <a:r>
               <a:rPr sz="1100">
@@ -7792,24 +7605,13 @@
             <a:r>
               <a:rPr sz="1100">
                 <a:solidFill>
-                  <a:srgbClr val="080808"/>
-                </a:solidFill>
-                <a:latin typeface="JetBrains Mono"/>
-                <a:ea typeface="JetBrains Mono"/>
-                <a:cs typeface="JetBrains Mono"/>
-              </a:rPr>
-              <a:t>            </a:t>
-            </a:r>
-            <a:r>
-              <a:rPr sz="1100">
-                <a:solidFill>
                   <a:srgbClr val="C45E00"/>
                 </a:solidFill>
                 <a:latin typeface="JetBrains Mono"/>
                 <a:ea typeface="JetBrains Mono"/>
                 <a:cs typeface="JetBrains Mono"/>
               </a:rPr>
-              <a:t>return</a:t>
+              <a:t>            return</a:t>
             </a:r>
             <a:r>
               <a:rPr sz="1100">
@@ -7835,24 +7637,13 @@
             <a:r>
               <a:rPr sz="1100">
                 <a:solidFill>
-                  <a:srgbClr val="080808"/>
-                </a:solidFill>
-                <a:latin typeface="JetBrains Mono"/>
-                <a:ea typeface="JetBrains Mono"/>
-                <a:cs typeface="JetBrains Mono"/>
-              </a:rPr>
-              <a:t>    </a:t>
-            </a:r>
-            <a:r>
-              <a:rPr sz="1100">
-                <a:solidFill>
                   <a:srgbClr val="C45E00"/>
                 </a:solidFill>
                 <a:latin typeface="JetBrains Mono"/>
                 <a:ea typeface="JetBrains Mono"/>
                 <a:cs typeface="JetBrains Mono"/>
               </a:rPr>
-              <a:t>return</a:t>
+              <a:t>    return</a:t>
             </a:r>
             <a:r>
               <a:rPr sz="1100">
@@ -8019,24 +7810,13 @@
             <a:r>
               <a:rPr sz="1100">
                 <a:solidFill>
-                  <a:srgbClr val="080808"/>
-                </a:solidFill>
-                <a:latin typeface="JetBrains Mono"/>
-                <a:ea typeface="JetBrains Mono"/>
-                <a:cs typeface="JetBrains Mono"/>
-              </a:rPr>
-              <a:t>    </a:t>
-            </a:r>
-            <a:r>
-              <a:rPr sz="1100">
-                <a:solidFill>
                   <a:srgbClr val="1750EB"/>
                 </a:solidFill>
                 <a:latin typeface="JetBrains Mono"/>
                 <a:ea typeface="JetBrains Mono"/>
                 <a:cs typeface="JetBrains Mono"/>
               </a:rPr>
-              <a:t>print</a:t>
+              <a:t>    print</a:t>
             </a:r>
             <a:r>
               <a:rPr sz="1100">
@@ -8759,24 +8539,13 @@
             <a:r>
               <a:rPr sz="1100">
                 <a:solidFill>
-                  <a:srgbClr val="080808"/>
-                </a:solidFill>
-                <a:latin typeface="JetBrains Mono"/>
-                <a:ea typeface="JetBrains Mono"/>
-                <a:cs typeface="JetBrains Mono"/>
-              </a:rPr>
-              <a:t>    </a:t>
-            </a:r>
-            <a:r>
-              <a:rPr sz="1100">
-                <a:solidFill>
                   <a:srgbClr val="C45E00"/>
                 </a:solidFill>
                 <a:latin typeface="JetBrains Mono"/>
                 <a:ea typeface="JetBrains Mono"/>
                 <a:cs typeface="JetBrains Mono"/>
               </a:rPr>
-              <a:t>for</a:t>
+              <a:t>    for</a:t>
             </a:r>
             <a:r>
               <a:rPr sz="1100">
@@ -8824,24 +8593,13 @@
             <a:r>
               <a:rPr sz="1100">
                 <a:solidFill>
-                  <a:srgbClr val="080808"/>
-                </a:solidFill>
-                <a:latin typeface="JetBrains Mono"/>
-                <a:ea typeface="JetBrains Mono"/>
-                <a:cs typeface="JetBrains Mono"/>
-              </a:rPr>
-              <a:t>        </a:t>
-            </a:r>
-            <a:r>
-              <a:rPr sz="1100">
-                <a:solidFill>
                   <a:srgbClr val="C45E00"/>
                 </a:solidFill>
                 <a:latin typeface="JetBrains Mono"/>
                 <a:ea typeface="JetBrains Mono"/>
                 <a:cs typeface="JetBrains Mono"/>
               </a:rPr>
-              <a:t>if</a:t>
+              <a:t>        if</a:t>
             </a:r>
             <a:r>
               <a:rPr sz="1100">
@@ -8889,24 +8647,13 @@
             <a:r>
               <a:rPr sz="1100">
                 <a:solidFill>
-                  <a:srgbClr val="080808"/>
-                </a:solidFill>
-                <a:latin typeface="JetBrains Mono"/>
-                <a:ea typeface="JetBrains Mono"/>
-                <a:cs typeface="JetBrains Mono"/>
-              </a:rPr>
-              <a:t>            </a:t>
-            </a:r>
-            <a:r>
-              <a:rPr sz="1100">
-                <a:solidFill>
                   <a:srgbClr val="C45E00"/>
                 </a:solidFill>
                 <a:latin typeface="JetBrains Mono"/>
                 <a:ea typeface="JetBrains Mono"/>
                 <a:cs typeface="JetBrains Mono"/>
               </a:rPr>
-              <a:t>return</a:t>
+              <a:t>            return</a:t>
             </a:r>
             <a:r>
               <a:rPr sz="1100">
@@ -8932,24 +8679,13 @@
             <a:r>
               <a:rPr sz="1100">
                 <a:solidFill>
-                  <a:srgbClr val="080808"/>
-                </a:solidFill>
-                <a:latin typeface="JetBrains Mono"/>
-                <a:ea typeface="JetBrains Mono"/>
-                <a:cs typeface="JetBrains Mono"/>
-              </a:rPr>
-              <a:t>    </a:t>
-            </a:r>
-            <a:r>
-              <a:rPr sz="1100">
-                <a:solidFill>
                   <a:srgbClr val="C45E00"/>
                 </a:solidFill>
                 <a:latin typeface="JetBrains Mono"/>
                 <a:ea typeface="JetBrains Mono"/>
                 <a:cs typeface="JetBrains Mono"/>
               </a:rPr>
-              <a:t>return</a:t>
+              <a:t>    return</a:t>
             </a:r>
             <a:r>
               <a:rPr sz="1100">
@@ -9116,24 +8852,13 @@
             <a:r>
               <a:rPr sz="1100">
                 <a:solidFill>
-                  <a:srgbClr val="080808"/>
-                </a:solidFill>
-                <a:latin typeface="JetBrains Mono"/>
-                <a:ea typeface="JetBrains Mono"/>
-                <a:cs typeface="JetBrains Mono"/>
-              </a:rPr>
-              <a:t>    </a:t>
-            </a:r>
-            <a:r>
-              <a:rPr sz="1100">
-                <a:solidFill>
                   <a:srgbClr val="1750EB"/>
                 </a:solidFill>
                 <a:latin typeface="JetBrains Mono"/>
                 <a:ea typeface="JetBrains Mono"/>
                 <a:cs typeface="JetBrains Mono"/>
               </a:rPr>
-              <a:t>print</a:t>
+              <a:t>    print</a:t>
             </a:r>
             <a:r>
               <a:rPr sz="1100">
@@ -9834,24 +9559,13 @@
             <a:r>
               <a:rPr sz="1100">
                 <a:solidFill>
-                  <a:srgbClr val="080808"/>
-                </a:solidFill>
-                <a:latin typeface="JetBrains Mono"/>
-                <a:ea typeface="JetBrains Mono"/>
-                <a:cs typeface="JetBrains Mono"/>
-              </a:rPr>
-              <a:t>    </a:t>
-            </a:r>
-            <a:r>
-              <a:rPr sz="1100">
-                <a:solidFill>
                   <a:srgbClr val="C45E00"/>
                 </a:solidFill>
                 <a:latin typeface="JetBrains Mono"/>
                 <a:ea typeface="JetBrains Mono"/>
                 <a:cs typeface="JetBrains Mono"/>
               </a:rPr>
-              <a:t>for</a:t>
+              <a:t>    for</a:t>
             </a:r>
             <a:r>
               <a:rPr sz="1100">
@@ -9899,24 +9613,13 @@
             <a:r>
               <a:rPr sz="1100">
                 <a:solidFill>
-                  <a:srgbClr val="080808"/>
-                </a:solidFill>
-                <a:latin typeface="JetBrains Mono"/>
-                <a:ea typeface="JetBrains Mono"/>
-                <a:cs typeface="JetBrains Mono"/>
-              </a:rPr>
-              <a:t>        </a:t>
-            </a:r>
-            <a:r>
-              <a:rPr sz="1100">
-                <a:solidFill>
                   <a:srgbClr val="C45E00"/>
                 </a:solidFill>
                 <a:latin typeface="JetBrains Mono"/>
                 <a:ea typeface="JetBrains Mono"/>
                 <a:cs typeface="JetBrains Mono"/>
               </a:rPr>
-              <a:t>if</a:t>
+              <a:t>        if</a:t>
             </a:r>
             <a:r>
               <a:rPr sz="1100">
@@ -9964,24 +9667,13 @@
             <a:r>
               <a:rPr sz="1100">
                 <a:solidFill>
-                  <a:srgbClr val="080808"/>
-                </a:solidFill>
-                <a:latin typeface="JetBrains Mono"/>
-                <a:ea typeface="JetBrains Mono"/>
-                <a:cs typeface="JetBrains Mono"/>
-              </a:rPr>
-              <a:t>            </a:t>
-            </a:r>
-            <a:r>
-              <a:rPr sz="1100">
-                <a:solidFill>
                   <a:srgbClr val="C45E00"/>
                 </a:solidFill>
                 <a:latin typeface="JetBrains Mono"/>
                 <a:ea typeface="JetBrains Mono"/>
                 <a:cs typeface="JetBrains Mono"/>
               </a:rPr>
-              <a:t>return</a:t>
+              <a:t>            return</a:t>
             </a:r>
             <a:r>
               <a:rPr sz="1100">
@@ -10007,24 +9699,13 @@
             <a:r>
               <a:rPr sz="1100">
                 <a:solidFill>
-                  <a:srgbClr val="080808"/>
-                </a:solidFill>
-                <a:latin typeface="JetBrains Mono"/>
-                <a:ea typeface="JetBrains Mono"/>
-                <a:cs typeface="JetBrains Mono"/>
-              </a:rPr>
-              <a:t>    </a:t>
-            </a:r>
-            <a:r>
-              <a:rPr sz="1100">
-                <a:solidFill>
                   <a:srgbClr val="C45E00"/>
                 </a:solidFill>
                 <a:latin typeface="JetBrains Mono"/>
                 <a:ea typeface="JetBrains Mono"/>
                 <a:cs typeface="JetBrains Mono"/>
               </a:rPr>
-              <a:t>return</a:t>
+              <a:t>    return</a:t>
             </a:r>
             <a:r>
               <a:rPr sz="1100">
@@ -10191,24 +9872,13 @@
             <a:r>
               <a:rPr sz="1100">
                 <a:solidFill>
-                  <a:srgbClr val="080808"/>
-                </a:solidFill>
-                <a:latin typeface="JetBrains Mono"/>
-                <a:ea typeface="JetBrains Mono"/>
-                <a:cs typeface="JetBrains Mono"/>
-              </a:rPr>
-              <a:t>    </a:t>
-            </a:r>
-            <a:r>
-              <a:rPr sz="1100">
-                <a:solidFill>
                   <a:srgbClr val="1750EB"/>
                 </a:solidFill>
                 <a:latin typeface="JetBrains Mono"/>
                 <a:ea typeface="JetBrains Mono"/>
                 <a:cs typeface="JetBrains Mono"/>
               </a:rPr>
-              <a:t>print</a:t>
+              <a:t>    print</a:t>
             </a:r>
             <a:r>
               <a:rPr sz="1100">
@@ -11038,24 +10708,13 @@
             <a:r>
               <a:rPr sz="1100">
                 <a:solidFill>
-                  <a:srgbClr val="080808"/>
-                </a:solidFill>
-                <a:latin typeface="JetBrains Mono"/>
-                <a:ea typeface="JetBrains Mono"/>
-                <a:cs typeface="JetBrains Mono"/>
-              </a:rPr>
-              <a:t>    </a:t>
-            </a:r>
-            <a:r>
-              <a:rPr sz="1100">
-                <a:solidFill>
                   <a:srgbClr val="C45E00"/>
                 </a:solidFill>
                 <a:latin typeface="JetBrains Mono"/>
                 <a:ea typeface="JetBrains Mono"/>
                 <a:cs typeface="JetBrains Mono"/>
               </a:rPr>
-              <a:t>for</a:t>
+              <a:t>    for</a:t>
             </a:r>
             <a:r>
               <a:rPr sz="1100">
@@ -11103,24 +10762,13 @@
             <a:r>
               <a:rPr sz="1100">
                 <a:solidFill>
-                  <a:srgbClr val="080808"/>
-                </a:solidFill>
-                <a:latin typeface="JetBrains Mono"/>
-                <a:ea typeface="JetBrains Mono"/>
-                <a:cs typeface="JetBrains Mono"/>
-              </a:rPr>
-              <a:t>        </a:t>
-            </a:r>
-            <a:r>
-              <a:rPr sz="1100">
-                <a:solidFill>
                   <a:srgbClr val="C45E00"/>
                 </a:solidFill>
                 <a:latin typeface="JetBrains Mono"/>
                 <a:ea typeface="JetBrains Mono"/>
                 <a:cs typeface="JetBrains Mono"/>
               </a:rPr>
-              <a:t>if</a:t>
+              <a:t>        if</a:t>
             </a:r>
             <a:r>
               <a:rPr sz="1100">
@@ -11168,24 +10816,13 @@
             <a:r>
               <a:rPr sz="1100">
                 <a:solidFill>
-                  <a:srgbClr val="080808"/>
-                </a:solidFill>
-                <a:latin typeface="JetBrains Mono"/>
-                <a:ea typeface="JetBrains Mono"/>
-                <a:cs typeface="JetBrains Mono"/>
-              </a:rPr>
-              <a:t>            </a:t>
-            </a:r>
-            <a:r>
-              <a:rPr sz="1100">
-                <a:solidFill>
                   <a:srgbClr val="C45E00"/>
                 </a:solidFill>
                 <a:latin typeface="JetBrains Mono"/>
                 <a:ea typeface="JetBrains Mono"/>
                 <a:cs typeface="JetBrains Mono"/>
               </a:rPr>
-              <a:t>return</a:t>
+              <a:t>            return</a:t>
             </a:r>
             <a:r>
               <a:rPr sz="1100">
@@ -11211,24 +10848,13 @@
             <a:r>
               <a:rPr sz="1100">
                 <a:solidFill>
-                  <a:srgbClr val="080808"/>
-                </a:solidFill>
-                <a:latin typeface="JetBrains Mono"/>
-                <a:ea typeface="JetBrains Mono"/>
-                <a:cs typeface="JetBrains Mono"/>
-              </a:rPr>
-              <a:t>    </a:t>
-            </a:r>
-            <a:r>
-              <a:rPr sz="1100">
-                <a:solidFill>
                   <a:srgbClr val="C45E00"/>
                 </a:solidFill>
                 <a:latin typeface="JetBrains Mono"/>
                 <a:ea typeface="JetBrains Mono"/>
                 <a:cs typeface="JetBrains Mono"/>
               </a:rPr>
-              <a:t>return</a:t>
+              <a:t>    return</a:t>
             </a:r>
             <a:r>
               <a:rPr sz="1100">
@@ -11395,24 +11021,13 @@
             <a:r>
               <a:rPr sz="1100">
                 <a:solidFill>
-                  <a:srgbClr val="080808"/>
-                </a:solidFill>
-                <a:latin typeface="JetBrains Mono"/>
-                <a:ea typeface="JetBrains Mono"/>
-                <a:cs typeface="JetBrains Mono"/>
-              </a:rPr>
-              <a:t>    </a:t>
-            </a:r>
-            <a:r>
-              <a:rPr sz="1100">
-                <a:solidFill>
                   <a:srgbClr val="1750EB"/>
                 </a:solidFill>
                 <a:latin typeface="JetBrains Mono"/>
                 <a:ea typeface="JetBrains Mono"/>
                 <a:cs typeface="JetBrains Mono"/>
               </a:rPr>
-              <a:t>print</a:t>
+              <a:t>    print</a:t>
             </a:r>
             <a:r>
               <a:rPr sz="1100">
@@ -11731,24 +11346,13 @@
             <a:r>
               <a:rPr sz="1800">
                 <a:solidFill>
-                  <a:srgbClr val="080808"/>
-                </a:solidFill>
-                <a:latin typeface="JetBrains Mono"/>
-                <a:ea typeface="JetBrains Mono"/>
-                <a:cs typeface="JetBrains Mono"/>
-              </a:rPr>
-              <a:t>    </a:t>
-            </a:r>
-            <a:r>
-              <a:rPr sz="1800">
-                <a:solidFill>
                   <a:srgbClr val="C45E00"/>
                 </a:solidFill>
                 <a:latin typeface="JetBrains Mono"/>
                 <a:ea typeface="JetBrains Mono"/>
                 <a:cs typeface="JetBrains Mono"/>
               </a:rPr>
-              <a:t>for</a:t>
+              <a:t>    for</a:t>
             </a:r>
             <a:r>
               <a:rPr sz="1800">
@@ -11794,24 +11398,13 @@
             <a:r>
               <a:rPr sz="1800">
                 <a:solidFill>
-                  <a:srgbClr val="080808"/>
-                </a:solidFill>
-                <a:latin typeface="JetBrains Mono"/>
-                <a:ea typeface="JetBrains Mono"/>
-                <a:cs typeface="JetBrains Mono"/>
-              </a:rPr>
-              <a:t>        </a:t>
-            </a:r>
-            <a:r>
-              <a:rPr sz="1800">
-                <a:solidFill>
                   <a:srgbClr val="C45E00"/>
                 </a:solidFill>
                 <a:latin typeface="JetBrains Mono"/>
                 <a:ea typeface="JetBrains Mono"/>
                 <a:cs typeface="JetBrains Mono"/>
               </a:rPr>
-              <a:t>if</a:t>
+              <a:t>        if</a:t>
             </a:r>
             <a:r>
               <a:rPr sz="1800">
@@ -11857,24 +11450,13 @@
             <a:r>
               <a:rPr sz="1800">
                 <a:solidFill>
-                  <a:srgbClr val="080808"/>
-                </a:solidFill>
-                <a:latin typeface="JetBrains Mono"/>
-                <a:ea typeface="JetBrains Mono"/>
-                <a:cs typeface="JetBrains Mono"/>
-              </a:rPr>
-              <a:t>            </a:t>
-            </a:r>
-            <a:r>
-              <a:rPr sz="1800">
-                <a:solidFill>
                   <a:srgbClr val="C45E00"/>
                 </a:solidFill>
                 <a:latin typeface="JetBrains Mono"/>
                 <a:ea typeface="JetBrains Mono"/>
                 <a:cs typeface="JetBrains Mono"/>
               </a:rPr>
-              <a:t>return</a:t>
+              <a:t>            return</a:t>
             </a:r>
             <a:r>
               <a:rPr sz="1800">
@@ -11898,24 +11480,13 @@
             <a:r>
               <a:rPr sz="1800">
                 <a:solidFill>
-                  <a:srgbClr val="080808"/>
-                </a:solidFill>
-                <a:latin typeface="JetBrains Mono"/>
-                <a:ea typeface="JetBrains Mono"/>
-                <a:cs typeface="JetBrains Mono"/>
-              </a:rPr>
-              <a:t>        </a:t>
-            </a:r>
-            <a:r>
-              <a:rPr sz="1800">
-                <a:solidFill>
                   <a:srgbClr val="C45E00"/>
                 </a:solidFill>
                 <a:latin typeface="JetBrains Mono"/>
                 <a:ea typeface="JetBrains Mono"/>
                 <a:cs typeface="JetBrains Mono"/>
               </a:rPr>
-              <a:t>return</a:t>
+              <a:t>        return</a:t>
             </a:r>
             <a:r>
               <a:rPr sz="1800">
